--- a/workflow_linear_diagram.pptx
+++ b/workflow_linear_diagram.pptx
@@ -3104,8 +3104,8 @@
         </p:nvSpPr>
         <p:spPr>
           <a:xfrm>
-            <a:off x="457200" y="228600"/>
-            <a:ext cx="13716000" cy="411480"/>
+            <a:off x="411480" y="182880"/>
+            <a:ext cx="13716000" cy="402336"/>
           </a:xfrm>
           <a:prstGeom prst="rect">
             <a:avLst/>
@@ -3126,7 +3126,7 @@
                 </a:solidFill>
                 <a:latin typeface="Arial"/>
               </a:rPr>
-              <a:t>GoEmotions-RoBERTa-XAI Linear Workflow</a:t>
+              <a:t>GoEmotions-RoBERTa-XAI Detailed Workflow</a:t>
             </a:r>
           </a:p>
         </p:txBody>
@@ -3139,8 +3139,8 @@
         </p:nvSpPr>
         <p:spPr>
           <a:xfrm>
-            <a:off x="1097280" y="658368"/>
-            <a:ext cx="12435840" cy="320040"/>
+            <a:off x="822960" y="566928"/>
+            <a:ext cx="12984480" cy="274320"/>
           </a:xfrm>
           <a:prstGeom prst="rect">
             <a:avLst/>
@@ -3155,13 +3155,13 @@
           <a:p>
             <a:pPr algn="ctr"/>
             <a:r>
-              <a:rPr sz="1200" b="0">
+              <a:rPr sz="1140" b="0">
                 <a:solidFill>
                   <a:srgbClr val="004080"/>
                 </a:solidFill>
                 <a:latin typeface="Arial"/>
               </a:rPr>
-              <a:t>Simplified straight-line version of the full training and deployment workflow</a:t>
+              <a:t>Reference-style publication diagram with dataset flow, training core, calibration, and final report</a:t>
             </a:r>
           </a:p>
         </p:txBody>
@@ -3174,16 +3174,16 @@
         </p:nvSpPr>
         <p:spPr>
           <a:xfrm>
-            <a:off x="256032" y="2331720"/>
-            <a:ext cx="1572768" cy="1444752"/>
+            <a:off x="164592" y="1481328"/>
+            <a:ext cx="2148840" cy="2606040"/>
           </a:xfrm>
           <a:prstGeom prst="roundRect">
             <a:avLst/>
           </a:prstGeom>
           <a:solidFill>
-            <a:srgbClr val="E6F2FF"/>
-          </a:solidFill>
-          <a:ln w="22860">
+            <a:srgbClr val="F3ECFF"/>
+          </a:solidFill>
+          <a:ln w="19050">
             <a:solidFill>
               <a:srgbClr val="004080"/>
             </a:solidFill>
@@ -3213,14 +3213,59 @@
       </p:sp>
       <p:sp>
         <p:nvSpPr>
-          <p:cNvPr id="5" name="TextBox 4"/>
+          <p:cNvPr id="5" name="Rectangle 4"/>
+          <p:cNvSpPr/>
+          <p:nvPr/>
+        </p:nvSpPr>
+        <p:spPr>
+          <a:xfrm>
+            <a:off x="274320" y="1609344"/>
+            <a:ext cx="576072" cy="576072"/>
+          </a:xfrm>
+          <a:prstGeom prst="rect">
+            <a:avLst/>
+          </a:prstGeom>
+          <a:solidFill>
+            <a:srgbClr val="EAD5FF"/>
+          </a:solidFill>
+          <a:ln w="12700">
+            <a:solidFill>
+              <a:srgbClr val="5B2C83"/>
+            </a:solidFill>
+          </a:ln>
+        </p:spPr>
+        <p:style>
+          <a:lnRef idx="1">
+            <a:schemeClr val="accent1"/>
+          </a:lnRef>
+          <a:fillRef idx="3">
+            <a:schemeClr val="accent1"/>
+          </a:fillRef>
+          <a:effectRef idx="2">
+            <a:schemeClr val="accent1"/>
+          </a:effectRef>
+          <a:fontRef idx="minor">
+            <a:schemeClr val="lt1"/>
+          </a:fontRef>
+        </p:style>
+        <p:txBody>
+          <a:bodyPr rtlCol="0" anchor="ctr"/>
+          <a:lstStyle/>
+          <a:p>
+            <a:pPr algn="ctr"/>
+          </a:p>
+        </p:txBody>
+      </p:sp>
+      <p:sp>
+        <p:nvSpPr>
+          <p:cNvPr id="6" name="TextBox 5"/>
           <p:cNvSpPr txBox="1"/>
           <p:nvPr/>
         </p:nvSpPr>
         <p:spPr>
           <a:xfrm>
-            <a:off x="310896" y="2404872"/>
-            <a:ext cx="1463040" cy="237744"/>
+            <a:off x="301752" y="1645920"/>
+            <a:ext cx="521208" cy="502920"/>
           </a:xfrm>
           <a:prstGeom prst="rect">
             <a:avLst/>
@@ -3235,27 +3280,2369 @@
           <a:p>
             <a:pPr algn="ctr"/>
             <a:r>
-              <a:rPr sz="1100" b="1">
+              <a:rPr sz="720" b="1">
+                <a:solidFill>
+                  <a:srgbClr val="4A235A"/>
+                </a:solidFill>
+                <a:latin typeface="Arial"/>
+              </a:rPr>
+              <a:t>I finally
+feel calm</a:t>
+            </a:r>
+          </a:p>
+        </p:txBody>
+      </p:sp>
+      <p:sp>
+        <p:nvSpPr>
+          <p:cNvPr id="7" name="Rectangle 6"/>
+          <p:cNvSpPr/>
+          <p:nvPr/>
+        </p:nvSpPr>
+        <p:spPr>
+          <a:xfrm>
+            <a:off x="905256" y="1609344"/>
+            <a:ext cx="576072" cy="576072"/>
+          </a:xfrm>
+          <a:prstGeom prst="rect">
+            <a:avLst/>
+          </a:prstGeom>
+          <a:solidFill>
+            <a:srgbClr val="EAD5FF"/>
+          </a:solidFill>
+          <a:ln w="12700">
+            <a:solidFill>
+              <a:srgbClr val="5B2C83"/>
+            </a:solidFill>
+          </a:ln>
+        </p:spPr>
+        <p:style>
+          <a:lnRef idx="1">
+            <a:schemeClr val="accent1"/>
+          </a:lnRef>
+          <a:fillRef idx="3">
+            <a:schemeClr val="accent1"/>
+          </a:fillRef>
+          <a:effectRef idx="2">
+            <a:schemeClr val="accent1"/>
+          </a:effectRef>
+          <a:fontRef idx="minor">
+            <a:schemeClr val="lt1"/>
+          </a:fontRef>
+        </p:style>
+        <p:txBody>
+          <a:bodyPr rtlCol="0" anchor="ctr"/>
+          <a:lstStyle/>
+          <a:p>
+            <a:pPr algn="ctr"/>
+          </a:p>
+        </p:txBody>
+      </p:sp>
+      <p:sp>
+        <p:nvSpPr>
+          <p:cNvPr id="8" name="TextBox 7"/>
+          <p:cNvSpPr txBox="1"/>
+          <p:nvPr/>
+        </p:nvSpPr>
+        <p:spPr>
+          <a:xfrm>
+            <a:off x="932688" y="1645920"/>
+            <a:ext cx="521208" cy="502920"/>
+          </a:xfrm>
+          <a:prstGeom prst="rect">
+            <a:avLst/>
+          </a:prstGeom>
+          <a:noFill/>
+        </p:spPr>
+        <p:txBody>
+          <a:bodyPr wrap="square" anchor="ctr">
+            <a:spAutoFit/>
+          </a:bodyPr>
+          <a:lstStyle/>
+          <a:p>
+            <a:pPr algn="ctr"/>
+            <a:r>
+              <a:rPr sz="720" b="1">
+                <a:solidFill>
+                  <a:srgbClr val="4A235A"/>
+                </a:solidFill>
+                <a:latin typeface="Arial"/>
+              </a:rPr>
+              <a:t>This update
+made me smile</a:t>
+            </a:r>
+          </a:p>
+        </p:txBody>
+      </p:sp>
+      <p:sp>
+        <p:nvSpPr>
+          <p:cNvPr id="9" name="Rectangle 8"/>
+          <p:cNvSpPr/>
+          <p:nvPr/>
+        </p:nvSpPr>
+        <p:spPr>
+          <a:xfrm>
+            <a:off x="1536192" y="1609344"/>
+            <a:ext cx="576072" cy="576072"/>
+          </a:xfrm>
+          <a:prstGeom prst="rect">
+            <a:avLst/>
+          </a:prstGeom>
+          <a:solidFill>
+            <a:srgbClr val="EAD5FF"/>
+          </a:solidFill>
+          <a:ln w="12700">
+            <a:solidFill>
+              <a:srgbClr val="5B2C83"/>
+            </a:solidFill>
+          </a:ln>
+        </p:spPr>
+        <p:style>
+          <a:lnRef idx="1">
+            <a:schemeClr val="accent1"/>
+          </a:lnRef>
+          <a:fillRef idx="3">
+            <a:schemeClr val="accent1"/>
+          </a:fillRef>
+          <a:effectRef idx="2">
+            <a:schemeClr val="accent1"/>
+          </a:effectRef>
+          <a:fontRef idx="minor">
+            <a:schemeClr val="lt1"/>
+          </a:fontRef>
+        </p:style>
+        <p:txBody>
+          <a:bodyPr rtlCol="0" anchor="ctr"/>
+          <a:lstStyle/>
+          <a:p>
+            <a:pPr algn="ctr"/>
+          </a:p>
+        </p:txBody>
+      </p:sp>
+      <p:sp>
+        <p:nvSpPr>
+          <p:cNvPr id="10" name="TextBox 9"/>
+          <p:cNvSpPr txBox="1"/>
+          <p:nvPr/>
+        </p:nvSpPr>
+        <p:spPr>
+          <a:xfrm>
+            <a:off x="1563624" y="1645920"/>
+            <a:ext cx="521208" cy="502920"/>
+          </a:xfrm>
+          <a:prstGeom prst="rect">
+            <a:avLst/>
+          </a:prstGeom>
+          <a:noFill/>
+        </p:spPr>
+        <p:txBody>
+          <a:bodyPr wrap="square" anchor="ctr">
+            <a:spAutoFit/>
+          </a:bodyPr>
+          <a:lstStyle/>
+          <a:p>
+            <a:pPr algn="ctr"/>
+            <a:r>
+              <a:rPr sz="720" b="1">
+                <a:solidFill>
+                  <a:srgbClr val="4A235A"/>
+                </a:solidFill>
+                <a:latin typeface="Arial"/>
+              </a:rPr>
+              <a:t>I am nervous
+about tomorrow</a:t>
+            </a:r>
+          </a:p>
+        </p:txBody>
+      </p:sp>
+      <p:sp>
+        <p:nvSpPr>
+          <p:cNvPr id="11" name="Rectangle 10"/>
+          <p:cNvSpPr/>
+          <p:nvPr/>
+        </p:nvSpPr>
+        <p:spPr>
+          <a:xfrm>
+            <a:off x="274320" y="2240280"/>
+            <a:ext cx="576072" cy="576072"/>
+          </a:xfrm>
+          <a:prstGeom prst="rect">
+            <a:avLst/>
+          </a:prstGeom>
+          <a:solidFill>
+            <a:srgbClr val="EAD5FF"/>
+          </a:solidFill>
+          <a:ln w="12700">
+            <a:solidFill>
+              <a:srgbClr val="5B2C83"/>
+            </a:solidFill>
+          </a:ln>
+        </p:spPr>
+        <p:style>
+          <a:lnRef idx="1">
+            <a:schemeClr val="accent1"/>
+          </a:lnRef>
+          <a:fillRef idx="3">
+            <a:schemeClr val="accent1"/>
+          </a:fillRef>
+          <a:effectRef idx="2">
+            <a:schemeClr val="accent1"/>
+          </a:effectRef>
+          <a:fontRef idx="minor">
+            <a:schemeClr val="lt1"/>
+          </a:fontRef>
+        </p:style>
+        <p:txBody>
+          <a:bodyPr rtlCol="0" anchor="ctr"/>
+          <a:lstStyle/>
+          <a:p>
+            <a:pPr algn="ctr"/>
+          </a:p>
+        </p:txBody>
+      </p:sp>
+      <p:sp>
+        <p:nvSpPr>
+          <p:cNvPr id="12" name="TextBox 11"/>
+          <p:cNvSpPr txBox="1"/>
+          <p:nvPr/>
+        </p:nvSpPr>
+        <p:spPr>
+          <a:xfrm>
+            <a:off x="301752" y="2276856"/>
+            <a:ext cx="521208" cy="502920"/>
+          </a:xfrm>
+          <a:prstGeom prst="rect">
+            <a:avLst/>
+          </a:prstGeom>
+          <a:noFill/>
+        </p:spPr>
+        <p:txBody>
+          <a:bodyPr wrap="square" anchor="ctr">
+            <a:spAutoFit/>
+          </a:bodyPr>
+          <a:lstStyle/>
+          <a:p>
+            <a:pPr algn="ctr"/>
+            <a:r>
+              <a:rPr sz="720" b="1">
+                <a:solidFill>
+                  <a:srgbClr val="4A235A"/>
+                </a:solidFill>
+                <a:latin typeface="Arial"/>
+              </a:rPr>
+              <a:t>Proud of
+this result</a:t>
+            </a:r>
+          </a:p>
+        </p:txBody>
+      </p:sp>
+      <p:sp>
+        <p:nvSpPr>
+          <p:cNvPr id="13" name="Rectangle 12"/>
+          <p:cNvSpPr/>
+          <p:nvPr/>
+        </p:nvSpPr>
+        <p:spPr>
+          <a:xfrm>
+            <a:off x="905256" y="2240280"/>
+            <a:ext cx="576072" cy="576072"/>
+          </a:xfrm>
+          <a:prstGeom prst="rect">
+            <a:avLst/>
+          </a:prstGeom>
+          <a:solidFill>
+            <a:srgbClr val="EAD5FF"/>
+          </a:solidFill>
+          <a:ln w="12700">
+            <a:solidFill>
+              <a:srgbClr val="5B2C83"/>
+            </a:solidFill>
+          </a:ln>
+        </p:spPr>
+        <p:style>
+          <a:lnRef idx="1">
+            <a:schemeClr val="accent1"/>
+          </a:lnRef>
+          <a:fillRef idx="3">
+            <a:schemeClr val="accent1"/>
+          </a:fillRef>
+          <a:effectRef idx="2">
+            <a:schemeClr val="accent1"/>
+          </a:effectRef>
+          <a:fontRef idx="minor">
+            <a:schemeClr val="lt1"/>
+          </a:fontRef>
+        </p:style>
+        <p:txBody>
+          <a:bodyPr rtlCol="0" anchor="ctr"/>
+          <a:lstStyle/>
+          <a:p>
+            <a:pPr algn="ctr"/>
+          </a:p>
+        </p:txBody>
+      </p:sp>
+      <p:sp>
+        <p:nvSpPr>
+          <p:cNvPr id="14" name="TextBox 13"/>
+          <p:cNvSpPr txBox="1"/>
+          <p:nvPr/>
+        </p:nvSpPr>
+        <p:spPr>
+          <a:xfrm>
+            <a:off x="932688" y="2276856"/>
+            <a:ext cx="521208" cy="502920"/>
+          </a:xfrm>
+          <a:prstGeom prst="rect">
+            <a:avLst/>
+          </a:prstGeom>
+          <a:noFill/>
+        </p:spPr>
+        <p:txBody>
+          <a:bodyPr wrap="square" anchor="ctr">
+            <a:spAutoFit/>
+          </a:bodyPr>
+          <a:lstStyle/>
+          <a:p>
+            <a:pPr algn="ctr"/>
+            <a:r>
+              <a:rPr sz="720" b="1">
+                <a:solidFill>
+                  <a:srgbClr val="4A235A"/>
+                </a:solidFill>
+                <a:latin typeface="Arial"/>
+              </a:rPr>
+              <a:t>Still a little
+sad today</a:t>
+            </a:r>
+          </a:p>
+        </p:txBody>
+      </p:sp>
+      <p:sp>
+        <p:nvSpPr>
+          <p:cNvPr id="15" name="Rectangle 14"/>
+          <p:cNvSpPr/>
+          <p:nvPr/>
+        </p:nvSpPr>
+        <p:spPr>
+          <a:xfrm>
+            <a:off x="1536192" y="2240280"/>
+            <a:ext cx="576072" cy="576072"/>
+          </a:xfrm>
+          <a:prstGeom prst="rect">
+            <a:avLst/>
+          </a:prstGeom>
+          <a:solidFill>
+            <a:srgbClr val="EAD5FF"/>
+          </a:solidFill>
+          <a:ln w="12700">
+            <a:solidFill>
+              <a:srgbClr val="5B2C83"/>
+            </a:solidFill>
+          </a:ln>
+        </p:spPr>
+        <p:style>
+          <a:lnRef idx="1">
+            <a:schemeClr val="accent1"/>
+          </a:lnRef>
+          <a:fillRef idx="3">
+            <a:schemeClr val="accent1"/>
+          </a:fillRef>
+          <a:effectRef idx="2">
+            <a:schemeClr val="accent1"/>
+          </a:effectRef>
+          <a:fontRef idx="minor">
+            <a:schemeClr val="lt1"/>
+          </a:fontRef>
+        </p:style>
+        <p:txBody>
+          <a:bodyPr rtlCol="0" anchor="ctr"/>
+          <a:lstStyle/>
+          <a:p>
+            <a:pPr algn="ctr"/>
+          </a:p>
+        </p:txBody>
+      </p:sp>
+      <p:sp>
+        <p:nvSpPr>
+          <p:cNvPr id="16" name="TextBox 15"/>
+          <p:cNvSpPr txBox="1"/>
+          <p:nvPr/>
+        </p:nvSpPr>
+        <p:spPr>
+          <a:xfrm>
+            <a:off x="1563624" y="2276856"/>
+            <a:ext cx="521208" cy="502920"/>
+          </a:xfrm>
+          <a:prstGeom prst="rect">
+            <a:avLst/>
+          </a:prstGeom>
+          <a:noFill/>
+        </p:spPr>
+        <p:txBody>
+          <a:bodyPr wrap="square" anchor="ctr">
+            <a:spAutoFit/>
+          </a:bodyPr>
+          <a:lstStyle/>
+          <a:p>
+            <a:pPr algn="ctr"/>
+            <a:r>
+              <a:rPr sz="720" b="1">
+                <a:solidFill>
+                  <a:srgbClr val="4A235A"/>
+                </a:solidFill>
+                <a:latin typeface="Arial"/>
+              </a:rPr>
+              <a:t>Grateful for
+the support</a:t>
+            </a:r>
+          </a:p>
+        </p:txBody>
+      </p:sp>
+      <p:sp>
+        <p:nvSpPr>
+          <p:cNvPr id="17" name="Rectangle 16"/>
+          <p:cNvSpPr/>
+          <p:nvPr/>
+        </p:nvSpPr>
+        <p:spPr>
+          <a:xfrm>
+            <a:off x="274320" y="2871216"/>
+            <a:ext cx="576072" cy="576072"/>
+          </a:xfrm>
+          <a:prstGeom prst="rect">
+            <a:avLst/>
+          </a:prstGeom>
+          <a:solidFill>
+            <a:srgbClr val="EAD5FF"/>
+          </a:solidFill>
+          <a:ln w="12700">
+            <a:solidFill>
+              <a:srgbClr val="5B2C83"/>
+            </a:solidFill>
+          </a:ln>
+        </p:spPr>
+        <p:style>
+          <a:lnRef idx="1">
+            <a:schemeClr val="accent1"/>
+          </a:lnRef>
+          <a:fillRef idx="3">
+            <a:schemeClr val="accent1"/>
+          </a:fillRef>
+          <a:effectRef idx="2">
+            <a:schemeClr val="accent1"/>
+          </a:effectRef>
+          <a:fontRef idx="minor">
+            <a:schemeClr val="lt1"/>
+          </a:fontRef>
+        </p:style>
+        <p:txBody>
+          <a:bodyPr rtlCol="0" anchor="ctr"/>
+          <a:lstStyle/>
+          <a:p>
+            <a:pPr algn="ctr"/>
+          </a:p>
+        </p:txBody>
+      </p:sp>
+      <p:sp>
+        <p:nvSpPr>
+          <p:cNvPr id="18" name="TextBox 17"/>
+          <p:cNvSpPr txBox="1"/>
+          <p:nvPr/>
+        </p:nvSpPr>
+        <p:spPr>
+          <a:xfrm>
+            <a:off x="301752" y="2907792"/>
+            <a:ext cx="521208" cy="502920"/>
+          </a:xfrm>
+          <a:prstGeom prst="rect">
+            <a:avLst/>
+          </a:prstGeom>
+          <a:noFill/>
+        </p:spPr>
+        <p:txBody>
+          <a:bodyPr wrap="square" anchor="ctr">
+            <a:spAutoFit/>
+          </a:bodyPr>
+          <a:lstStyle/>
+          <a:p>
+            <a:pPr algn="ctr"/>
+            <a:r>
+              <a:rPr sz="720" b="1">
+                <a:solidFill>
+                  <a:srgbClr val="4A235A"/>
+                </a:solidFill>
+                <a:latin typeface="Arial"/>
+              </a:rPr>
+              <a:t>That joke was
+actually funny</a:t>
+            </a:r>
+          </a:p>
+        </p:txBody>
+      </p:sp>
+      <p:sp>
+        <p:nvSpPr>
+          <p:cNvPr id="19" name="Rectangle 18"/>
+          <p:cNvSpPr/>
+          <p:nvPr/>
+        </p:nvSpPr>
+        <p:spPr>
+          <a:xfrm>
+            <a:off x="905256" y="2871216"/>
+            <a:ext cx="576072" cy="576072"/>
+          </a:xfrm>
+          <a:prstGeom prst="rect">
+            <a:avLst/>
+          </a:prstGeom>
+          <a:solidFill>
+            <a:srgbClr val="EAD5FF"/>
+          </a:solidFill>
+          <a:ln w="12700">
+            <a:solidFill>
+              <a:srgbClr val="5B2C83"/>
+            </a:solidFill>
+          </a:ln>
+        </p:spPr>
+        <p:style>
+          <a:lnRef idx="1">
+            <a:schemeClr val="accent1"/>
+          </a:lnRef>
+          <a:fillRef idx="3">
+            <a:schemeClr val="accent1"/>
+          </a:fillRef>
+          <a:effectRef idx="2">
+            <a:schemeClr val="accent1"/>
+          </a:effectRef>
+          <a:fontRef idx="minor">
+            <a:schemeClr val="lt1"/>
+          </a:fontRef>
+        </p:style>
+        <p:txBody>
+          <a:bodyPr rtlCol="0" anchor="ctr"/>
+          <a:lstStyle/>
+          <a:p>
+            <a:pPr algn="ctr"/>
+          </a:p>
+        </p:txBody>
+      </p:sp>
+      <p:sp>
+        <p:nvSpPr>
+          <p:cNvPr id="20" name="TextBox 19"/>
+          <p:cNvSpPr txBox="1"/>
+          <p:nvPr/>
+        </p:nvSpPr>
+        <p:spPr>
+          <a:xfrm>
+            <a:off x="932688" y="2907792"/>
+            <a:ext cx="521208" cy="502920"/>
+          </a:xfrm>
+          <a:prstGeom prst="rect">
+            <a:avLst/>
+          </a:prstGeom>
+          <a:noFill/>
+        </p:spPr>
+        <p:txBody>
+          <a:bodyPr wrap="square" anchor="ctr">
+            <a:spAutoFit/>
+          </a:bodyPr>
+          <a:lstStyle/>
+          <a:p>
+            <a:pPr algn="ctr"/>
+            <a:r>
+              <a:rPr sz="720" b="1">
+                <a:solidFill>
+                  <a:srgbClr val="4A235A"/>
+                </a:solidFill>
+                <a:latin typeface="Arial"/>
+              </a:rPr>
+              <a:t>I love this
+community</a:t>
+            </a:r>
+          </a:p>
+        </p:txBody>
+      </p:sp>
+      <p:sp>
+        <p:nvSpPr>
+          <p:cNvPr id="21" name="Rectangle 20"/>
+          <p:cNvSpPr/>
+          <p:nvPr/>
+        </p:nvSpPr>
+        <p:spPr>
+          <a:xfrm>
+            <a:off x="1536192" y="2871216"/>
+            <a:ext cx="576072" cy="576072"/>
+          </a:xfrm>
+          <a:prstGeom prst="rect">
+            <a:avLst/>
+          </a:prstGeom>
+          <a:solidFill>
+            <a:srgbClr val="EAD5FF"/>
+          </a:solidFill>
+          <a:ln w="12700">
+            <a:solidFill>
+              <a:srgbClr val="5B2C83"/>
+            </a:solidFill>
+          </a:ln>
+        </p:spPr>
+        <p:style>
+          <a:lnRef idx="1">
+            <a:schemeClr val="accent1"/>
+          </a:lnRef>
+          <a:fillRef idx="3">
+            <a:schemeClr val="accent1"/>
+          </a:fillRef>
+          <a:effectRef idx="2">
+            <a:schemeClr val="accent1"/>
+          </a:effectRef>
+          <a:fontRef idx="minor">
+            <a:schemeClr val="lt1"/>
+          </a:fontRef>
+        </p:style>
+        <p:txBody>
+          <a:bodyPr rtlCol="0" anchor="ctr"/>
+          <a:lstStyle/>
+          <a:p>
+            <a:pPr algn="ctr"/>
+          </a:p>
+        </p:txBody>
+      </p:sp>
+      <p:sp>
+        <p:nvSpPr>
+          <p:cNvPr id="22" name="TextBox 21"/>
+          <p:cNvSpPr txBox="1"/>
+          <p:nvPr/>
+        </p:nvSpPr>
+        <p:spPr>
+          <a:xfrm>
+            <a:off x="1563624" y="2907792"/>
+            <a:ext cx="521208" cy="502920"/>
+          </a:xfrm>
+          <a:prstGeom prst="rect">
+            <a:avLst/>
+          </a:prstGeom>
+          <a:noFill/>
+        </p:spPr>
+        <p:txBody>
+          <a:bodyPr wrap="square" anchor="ctr">
+            <a:spAutoFit/>
+          </a:bodyPr>
+          <a:lstStyle/>
+          <a:p>
+            <a:pPr algn="ctr"/>
+            <a:r>
+              <a:rPr sz="720" b="1">
+                <a:solidFill>
+                  <a:srgbClr val="4A235A"/>
+                </a:solidFill>
+                <a:latin typeface="Arial"/>
+              </a:rPr>
+              <a:t>Frustrated, but
+still hopeful</a:t>
+            </a:r>
+          </a:p>
+        </p:txBody>
+      </p:sp>
+      <p:sp>
+        <p:nvSpPr>
+          <p:cNvPr id="23" name="TextBox 22"/>
+          <p:cNvSpPr txBox="1"/>
+          <p:nvPr/>
+        </p:nvSpPr>
+        <p:spPr>
+          <a:xfrm>
+            <a:off x="310896" y="3584448"/>
+            <a:ext cx="1865376" cy="384048"/>
+          </a:xfrm>
+          <a:prstGeom prst="rect">
+            <a:avLst/>
+          </a:prstGeom>
+          <a:noFill/>
+        </p:spPr>
+        <p:txBody>
+          <a:bodyPr wrap="square" anchor="ctr">
+            <a:spAutoFit/>
+          </a:bodyPr>
+          <a:lstStyle/>
+          <a:p>
+            <a:pPr algn="ctr"/>
+            <a:r>
+              <a:rPr sz="1320" b="1">
+                <a:solidFill>
+                  <a:srgbClr val="1F2937"/>
+                </a:solidFill>
+                <a:latin typeface="Arial"/>
+              </a:rPr>
+              <a:t>GoEmotions Reddit
+comment grid</a:t>
+            </a:r>
+          </a:p>
+        </p:txBody>
+      </p:sp>
+      <p:sp>
+        <p:nvSpPr>
+          <p:cNvPr id="24" name="TextBox 23"/>
+          <p:cNvSpPr txBox="1"/>
+          <p:nvPr/>
+        </p:nvSpPr>
+        <p:spPr>
+          <a:xfrm>
+            <a:off x="2615184" y="1188720"/>
+            <a:ext cx="2029968" cy="219456"/>
+          </a:xfrm>
+          <a:prstGeom prst="rect">
+            <a:avLst/>
+          </a:prstGeom>
+          <a:noFill/>
+        </p:spPr>
+        <p:txBody>
+          <a:bodyPr wrap="square" anchor="ctr">
+            <a:spAutoFit/>
+          </a:bodyPr>
+          <a:lstStyle/>
+          <a:p>
+            <a:pPr algn="ctr"/>
+            <a:r>
+              <a:rPr sz="1110" b="1">
+                <a:solidFill>
+                  <a:srgbClr val="1F2937"/>
+                </a:solidFill>
+                <a:latin typeface="Arial"/>
+              </a:rPr>
+              <a:t>Prepare token batches</a:t>
+            </a:r>
+          </a:p>
+        </p:txBody>
+      </p:sp>
+      <p:sp>
+        <p:nvSpPr>
+          <p:cNvPr id="25" name="TextBox 24"/>
+          <p:cNvSpPr txBox="1"/>
+          <p:nvPr/>
+        </p:nvSpPr>
+        <p:spPr>
+          <a:xfrm>
+            <a:off x="4590288" y="1188720"/>
+            <a:ext cx="1737360" cy="219456"/>
+          </a:xfrm>
+          <a:prstGeom prst="rect">
+            <a:avLst/>
+          </a:prstGeom>
+          <a:noFill/>
+        </p:spPr>
+        <p:txBody>
+          <a:bodyPr wrap="square" anchor="ctr">
+            <a:spAutoFit/>
+          </a:bodyPr>
+          <a:lstStyle/>
+          <a:p>
+            <a:pPr algn="ctr"/>
+            <a:r>
+              <a:rPr sz="1110" b="1">
+                <a:solidFill>
+                  <a:srgbClr val="1F2937"/>
+                </a:solidFill>
+                <a:latin typeface="Arial"/>
+              </a:rPr>
+              <a:t>Sequence of batches</a:t>
+            </a:r>
+          </a:p>
+        </p:txBody>
+      </p:sp>
+      <p:sp>
+        <p:nvSpPr>
+          <p:cNvPr id="26" name="Rectangle 25"/>
+          <p:cNvSpPr/>
+          <p:nvPr/>
+        </p:nvSpPr>
+        <p:spPr>
+          <a:xfrm>
+            <a:off x="2926080" y="1682496"/>
+            <a:ext cx="475488" cy="475488"/>
+          </a:xfrm>
+          <a:prstGeom prst="rect">
+            <a:avLst/>
+          </a:prstGeom>
+          <a:solidFill>
+            <a:srgbClr val="C78CF2"/>
+          </a:solidFill>
+          <a:ln w="12700">
+            <a:solidFill>
+              <a:srgbClr val="5B2C83"/>
+            </a:solidFill>
+          </a:ln>
+        </p:spPr>
+        <p:style>
+          <a:lnRef idx="1">
+            <a:schemeClr val="accent1"/>
+          </a:lnRef>
+          <a:fillRef idx="3">
+            <a:schemeClr val="accent1"/>
+          </a:fillRef>
+          <a:effectRef idx="2">
+            <a:schemeClr val="accent1"/>
+          </a:effectRef>
+          <a:fontRef idx="minor">
+            <a:schemeClr val="lt1"/>
+          </a:fontRef>
+        </p:style>
+        <p:txBody>
+          <a:bodyPr rtlCol="0" anchor="ctr"/>
+          <a:lstStyle/>
+          <a:p>
+            <a:pPr algn="ctr"/>
+          </a:p>
+        </p:txBody>
+      </p:sp>
+      <p:sp>
+        <p:nvSpPr>
+          <p:cNvPr id="27" name="Rectangle 26"/>
+          <p:cNvSpPr/>
+          <p:nvPr/>
+        </p:nvSpPr>
+        <p:spPr>
+          <a:xfrm>
+            <a:off x="2880360" y="1636776"/>
+            <a:ext cx="475488" cy="475488"/>
+          </a:xfrm>
+          <a:prstGeom prst="rect">
+            <a:avLst/>
+          </a:prstGeom>
+          <a:solidFill>
+            <a:srgbClr val="C78CF2"/>
+          </a:solidFill>
+          <a:ln w="12700">
+            <a:solidFill>
+              <a:srgbClr val="5B2C83"/>
+            </a:solidFill>
+          </a:ln>
+        </p:spPr>
+        <p:style>
+          <a:lnRef idx="1">
+            <a:schemeClr val="accent1"/>
+          </a:lnRef>
+          <a:fillRef idx="3">
+            <a:schemeClr val="accent1"/>
+          </a:fillRef>
+          <a:effectRef idx="2">
+            <a:schemeClr val="accent1"/>
+          </a:effectRef>
+          <a:fontRef idx="minor">
+            <a:schemeClr val="lt1"/>
+          </a:fontRef>
+        </p:style>
+        <p:txBody>
+          <a:bodyPr rtlCol="0" anchor="ctr"/>
+          <a:lstStyle/>
+          <a:p>
+            <a:pPr algn="ctr"/>
+          </a:p>
+        </p:txBody>
+      </p:sp>
+      <p:sp>
+        <p:nvSpPr>
+          <p:cNvPr id="28" name="Rectangle 27"/>
+          <p:cNvSpPr/>
+          <p:nvPr/>
+        </p:nvSpPr>
+        <p:spPr>
+          <a:xfrm>
+            <a:off x="2834640" y="1591056"/>
+            <a:ext cx="475488" cy="475488"/>
+          </a:xfrm>
+          <a:prstGeom prst="rect">
+            <a:avLst/>
+          </a:prstGeom>
+          <a:solidFill>
+            <a:srgbClr val="C78CF2"/>
+          </a:solidFill>
+          <a:ln w="12700">
+            <a:solidFill>
+              <a:srgbClr val="5B2C83"/>
+            </a:solidFill>
+          </a:ln>
+        </p:spPr>
+        <p:style>
+          <a:lnRef idx="1">
+            <a:schemeClr val="accent1"/>
+          </a:lnRef>
+          <a:fillRef idx="3">
+            <a:schemeClr val="accent1"/>
+          </a:fillRef>
+          <a:effectRef idx="2">
+            <a:schemeClr val="accent1"/>
+          </a:effectRef>
+          <a:fontRef idx="minor">
+            <a:schemeClr val="lt1"/>
+          </a:fontRef>
+        </p:style>
+        <p:txBody>
+          <a:bodyPr rtlCol="0" anchor="ctr"/>
+          <a:lstStyle/>
+          <a:p>
+            <a:pPr algn="ctr"/>
+          </a:p>
+        </p:txBody>
+      </p:sp>
+      <p:sp>
+        <p:nvSpPr>
+          <p:cNvPr id="29" name="TextBox 28"/>
+          <p:cNvSpPr txBox="1"/>
+          <p:nvPr/>
+        </p:nvSpPr>
+        <p:spPr>
+          <a:xfrm>
+            <a:off x="2788920" y="2103120"/>
+            <a:ext cx="621792" cy="164592"/>
+          </a:xfrm>
+          <a:prstGeom prst="rect">
+            <a:avLst/>
+          </a:prstGeom>
+          <a:noFill/>
+        </p:spPr>
+        <p:txBody>
+          <a:bodyPr wrap="square" anchor="ctr">
+            <a:spAutoFit/>
+          </a:bodyPr>
+          <a:lstStyle/>
+          <a:p>
+            <a:pPr algn="ctr"/>
+            <a:r>
+              <a:rPr sz="830" b="0">
+                <a:solidFill>
+                  <a:srgbClr val="4A235A"/>
+                </a:solidFill>
+                <a:latin typeface="Arial"/>
+              </a:rPr>
+              <a:t>Batch 1</a:t>
+            </a:r>
+          </a:p>
+        </p:txBody>
+      </p:sp>
+      <p:sp>
+        <p:nvSpPr>
+          <p:cNvPr id="30" name="Rectangle 29"/>
+          <p:cNvSpPr/>
+          <p:nvPr/>
+        </p:nvSpPr>
+        <p:spPr>
+          <a:xfrm>
+            <a:off x="4023360" y="1682496"/>
+            <a:ext cx="475488" cy="475488"/>
+          </a:xfrm>
+          <a:prstGeom prst="rect">
+            <a:avLst/>
+          </a:prstGeom>
+          <a:solidFill>
+            <a:srgbClr val="C78CF2"/>
+          </a:solidFill>
+          <a:ln w="12700">
+            <a:solidFill>
+              <a:srgbClr val="5B2C83"/>
+            </a:solidFill>
+          </a:ln>
+        </p:spPr>
+        <p:style>
+          <a:lnRef idx="1">
+            <a:schemeClr val="accent1"/>
+          </a:lnRef>
+          <a:fillRef idx="3">
+            <a:schemeClr val="accent1"/>
+          </a:fillRef>
+          <a:effectRef idx="2">
+            <a:schemeClr val="accent1"/>
+          </a:effectRef>
+          <a:fontRef idx="minor">
+            <a:schemeClr val="lt1"/>
+          </a:fontRef>
+        </p:style>
+        <p:txBody>
+          <a:bodyPr rtlCol="0" anchor="ctr"/>
+          <a:lstStyle/>
+          <a:p>
+            <a:pPr algn="ctr"/>
+          </a:p>
+        </p:txBody>
+      </p:sp>
+      <p:sp>
+        <p:nvSpPr>
+          <p:cNvPr id="31" name="Rectangle 30"/>
+          <p:cNvSpPr/>
+          <p:nvPr/>
+        </p:nvSpPr>
+        <p:spPr>
+          <a:xfrm>
+            <a:off x="3977640" y="1636776"/>
+            <a:ext cx="475488" cy="475488"/>
+          </a:xfrm>
+          <a:prstGeom prst="rect">
+            <a:avLst/>
+          </a:prstGeom>
+          <a:solidFill>
+            <a:srgbClr val="C78CF2"/>
+          </a:solidFill>
+          <a:ln w="12700">
+            <a:solidFill>
+              <a:srgbClr val="5B2C83"/>
+            </a:solidFill>
+          </a:ln>
+        </p:spPr>
+        <p:style>
+          <a:lnRef idx="1">
+            <a:schemeClr val="accent1"/>
+          </a:lnRef>
+          <a:fillRef idx="3">
+            <a:schemeClr val="accent1"/>
+          </a:fillRef>
+          <a:effectRef idx="2">
+            <a:schemeClr val="accent1"/>
+          </a:effectRef>
+          <a:fontRef idx="minor">
+            <a:schemeClr val="lt1"/>
+          </a:fontRef>
+        </p:style>
+        <p:txBody>
+          <a:bodyPr rtlCol="0" anchor="ctr"/>
+          <a:lstStyle/>
+          <a:p>
+            <a:pPr algn="ctr"/>
+          </a:p>
+        </p:txBody>
+      </p:sp>
+      <p:sp>
+        <p:nvSpPr>
+          <p:cNvPr id="32" name="Rectangle 31"/>
+          <p:cNvSpPr/>
+          <p:nvPr/>
+        </p:nvSpPr>
+        <p:spPr>
+          <a:xfrm>
+            <a:off x="3931920" y="1591056"/>
+            <a:ext cx="475488" cy="475488"/>
+          </a:xfrm>
+          <a:prstGeom prst="rect">
+            <a:avLst/>
+          </a:prstGeom>
+          <a:solidFill>
+            <a:srgbClr val="C78CF2"/>
+          </a:solidFill>
+          <a:ln w="12700">
+            <a:solidFill>
+              <a:srgbClr val="5B2C83"/>
+            </a:solidFill>
+          </a:ln>
+        </p:spPr>
+        <p:style>
+          <a:lnRef idx="1">
+            <a:schemeClr val="accent1"/>
+          </a:lnRef>
+          <a:fillRef idx="3">
+            <a:schemeClr val="accent1"/>
+          </a:fillRef>
+          <a:effectRef idx="2">
+            <a:schemeClr val="accent1"/>
+          </a:effectRef>
+          <a:fontRef idx="minor">
+            <a:schemeClr val="lt1"/>
+          </a:fontRef>
+        </p:style>
+        <p:txBody>
+          <a:bodyPr rtlCol="0" anchor="ctr"/>
+          <a:lstStyle/>
+          <a:p>
+            <a:pPr algn="ctr"/>
+          </a:p>
+        </p:txBody>
+      </p:sp>
+      <p:sp>
+        <p:nvSpPr>
+          <p:cNvPr id="33" name="TextBox 32"/>
+          <p:cNvSpPr txBox="1"/>
+          <p:nvPr/>
+        </p:nvSpPr>
+        <p:spPr>
+          <a:xfrm>
+            <a:off x="3886200" y="2103120"/>
+            <a:ext cx="621792" cy="164592"/>
+          </a:xfrm>
+          <a:prstGeom prst="rect">
+            <a:avLst/>
+          </a:prstGeom>
+          <a:noFill/>
+        </p:spPr>
+        <p:txBody>
+          <a:bodyPr wrap="square" anchor="ctr">
+            <a:spAutoFit/>
+          </a:bodyPr>
+          <a:lstStyle/>
+          <a:p>
+            <a:pPr algn="ctr"/>
+            <a:r>
+              <a:rPr sz="830" b="0">
+                <a:solidFill>
+                  <a:srgbClr val="4A235A"/>
+                </a:solidFill>
+                <a:latin typeface="Arial"/>
+              </a:rPr>
+              <a:t>Batch 2</a:t>
+            </a:r>
+          </a:p>
+        </p:txBody>
+      </p:sp>
+      <p:sp>
+        <p:nvSpPr>
+          <p:cNvPr id="34" name="TextBox 33"/>
+          <p:cNvSpPr txBox="1"/>
+          <p:nvPr/>
+        </p:nvSpPr>
+        <p:spPr>
+          <a:xfrm>
+            <a:off x="5065776" y="1700784"/>
+            <a:ext cx="310896" cy="182880"/>
+          </a:xfrm>
+          <a:prstGeom prst="rect">
+            <a:avLst/>
+          </a:prstGeom>
+          <a:noFill/>
+        </p:spPr>
+        <p:txBody>
+          <a:bodyPr wrap="square" anchor="ctr">
+            <a:spAutoFit/>
+          </a:bodyPr>
+          <a:lstStyle/>
+          <a:p>
+            <a:pPr algn="ctr"/>
+            <a:r>
+              <a:rPr sz="1800" b="1">
+                <a:solidFill>
+                  <a:srgbClr val="1F2937"/>
+                </a:solidFill>
+                <a:latin typeface="Arial"/>
+              </a:rPr>
+              <a:t>...</a:t>
+            </a:r>
+          </a:p>
+        </p:txBody>
+      </p:sp>
+      <p:sp>
+        <p:nvSpPr>
+          <p:cNvPr id="35" name="Rectangle 34"/>
+          <p:cNvSpPr/>
+          <p:nvPr/>
+        </p:nvSpPr>
+        <p:spPr>
+          <a:xfrm>
+            <a:off x="5541264" y="1682496"/>
+            <a:ext cx="475488" cy="475488"/>
+          </a:xfrm>
+          <a:prstGeom prst="rect">
+            <a:avLst/>
+          </a:prstGeom>
+          <a:solidFill>
+            <a:srgbClr val="C78CF2"/>
+          </a:solidFill>
+          <a:ln w="12700">
+            <a:solidFill>
+              <a:srgbClr val="5B2C83"/>
+            </a:solidFill>
+          </a:ln>
+        </p:spPr>
+        <p:style>
+          <a:lnRef idx="1">
+            <a:schemeClr val="accent1"/>
+          </a:lnRef>
+          <a:fillRef idx="3">
+            <a:schemeClr val="accent1"/>
+          </a:fillRef>
+          <a:effectRef idx="2">
+            <a:schemeClr val="accent1"/>
+          </a:effectRef>
+          <a:fontRef idx="minor">
+            <a:schemeClr val="lt1"/>
+          </a:fontRef>
+        </p:style>
+        <p:txBody>
+          <a:bodyPr rtlCol="0" anchor="ctr"/>
+          <a:lstStyle/>
+          <a:p>
+            <a:pPr algn="ctr"/>
+          </a:p>
+        </p:txBody>
+      </p:sp>
+      <p:sp>
+        <p:nvSpPr>
+          <p:cNvPr id="36" name="Rectangle 35"/>
+          <p:cNvSpPr/>
+          <p:nvPr/>
+        </p:nvSpPr>
+        <p:spPr>
+          <a:xfrm>
+            <a:off x="5495544" y="1636776"/>
+            <a:ext cx="475488" cy="475488"/>
+          </a:xfrm>
+          <a:prstGeom prst="rect">
+            <a:avLst/>
+          </a:prstGeom>
+          <a:solidFill>
+            <a:srgbClr val="C78CF2"/>
+          </a:solidFill>
+          <a:ln w="12700">
+            <a:solidFill>
+              <a:srgbClr val="5B2C83"/>
+            </a:solidFill>
+          </a:ln>
+        </p:spPr>
+        <p:style>
+          <a:lnRef idx="1">
+            <a:schemeClr val="accent1"/>
+          </a:lnRef>
+          <a:fillRef idx="3">
+            <a:schemeClr val="accent1"/>
+          </a:fillRef>
+          <a:effectRef idx="2">
+            <a:schemeClr val="accent1"/>
+          </a:effectRef>
+          <a:fontRef idx="minor">
+            <a:schemeClr val="lt1"/>
+          </a:fontRef>
+        </p:style>
+        <p:txBody>
+          <a:bodyPr rtlCol="0" anchor="ctr"/>
+          <a:lstStyle/>
+          <a:p>
+            <a:pPr algn="ctr"/>
+          </a:p>
+        </p:txBody>
+      </p:sp>
+      <p:sp>
+        <p:nvSpPr>
+          <p:cNvPr id="37" name="Rectangle 36"/>
+          <p:cNvSpPr/>
+          <p:nvPr/>
+        </p:nvSpPr>
+        <p:spPr>
+          <a:xfrm>
+            <a:off x="5449824" y="1591056"/>
+            <a:ext cx="475488" cy="475488"/>
+          </a:xfrm>
+          <a:prstGeom prst="rect">
+            <a:avLst/>
+          </a:prstGeom>
+          <a:solidFill>
+            <a:srgbClr val="C78CF2"/>
+          </a:solidFill>
+          <a:ln w="12700">
+            <a:solidFill>
+              <a:srgbClr val="5B2C83"/>
+            </a:solidFill>
+          </a:ln>
+        </p:spPr>
+        <p:style>
+          <a:lnRef idx="1">
+            <a:schemeClr val="accent1"/>
+          </a:lnRef>
+          <a:fillRef idx="3">
+            <a:schemeClr val="accent1"/>
+          </a:fillRef>
+          <a:effectRef idx="2">
+            <a:schemeClr val="accent1"/>
+          </a:effectRef>
+          <a:fontRef idx="minor">
+            <a:schemeClr val="lt1"/>
+          </a:fontRef>
+        </p:style>
+        <p:txBody>
+          <a:bodyPr rtlCol="0" anchor="ctr"/>
+          <a:lstStyle/>
+          <a:p>
+            <a:pPr algn="ctr"/>
+          </a:p>
+        </p:txBody>
+      </p:sp>
+      <p:sp>
+        <p:nvSpPr>
+          <p:cNvPr id="38" name="TextBox 37"/>
+          <p:cNvSpPr txBox="1"/>
+          <p:nvPr/>
+        </p:nvSpPr>
+        <p:spPr>
+          <a:xfrm>
+            <a:off x="5404104" y="2103120"/>
+            <a:ext cx="621792" cy="164592"/>
+          </a:xfrm>
+          <a:prstGeom prst="rect">
+            <a:avLst/>
+          </a:prstGeom>
+          <a:noFill/>
+        </p:spPr>
+        <p:txBody>
+          <a:bodyPr wrap="square" anchor="ctr">
+            <a:spAutoFit/>
+          </a:bodyPr>
+          <a:lstStyle/>
+          <a:p>
+            <a:pPr algn="ctr"/>
+            <a:r>
+              <a:rPr sz="830" b="0">
+                <a:solidFill>
+                  <a:srgbClr val="4A235A"/>
+                </a:solidFill>
+                <a:latin typeface="Arial"/>
+              </a:rPr>
+              <a:t>Batch n</a:t>
+            </a:r>
+          </a:p>
+        </p:txBody>
+      </p:sp>
+      <p:sp>
+        <p:nvSpPr>
+          <p:cNvPr id="39" name="Rounded Rectangle 38"/>
+          <p:cNvSpPr/>
+          <p:nvPr/>
+        </p:nvSpPr>
+        <p:spPr>
+          <a:xfrm>
+            <a:off x="2834640" y="2157984"/>
+            <a:ext cx="4160520" cy="2697480"/>
+          </a:xfrm>
+          <a:prstGeom prst="roundRect">
+            <a:avLst/>
+          </a:prstGeom>
+          <a:solidFill>
+            <a:srgbClr val="F9F2FB"/>
+          </a:solidFill>
+          <a:ln w="15240">
+            <a:solidFill>
+              <a:srgbClr val="D1B3D8"/>
+            </a:solidFill>
+          </a:ln>
+        </p:spPr>
+        <p:style>
+          <a:lnRef idx="1">
+            <a:schemeClr val="accent1"/>
+          </a:lnRef>
+          <a:fillRef idx="3">
+            <a:schemeClr val="accent1"/>
+          </a:fillRef>
+          <a:effectRef idx="2">
+            <a:schemeClr val="accent1"/>
+          </a:effectRef>
+          <a:fontRef idx="minor">
+            <a:schemeClr val="lt1"/>
+          </a:fontRef>
+        </p:style>
+        <p:txBody>
+          <a:bodyPr rtlCol="0" anchor="ctr"/>
+          <a:lstStyle/>
+          <a:p>
+            <a:pPr algn="ctr"/>
+          </a:p>
+        </p:txBody>
+      </p:sp>
+      <p:sp>
+        <p:nvSpPr>
+          <p:cNvPr id="40" name="Rounded Rectangle 39"/>
+          <p:cNvSpPr/>
+          <p:nvPr/>
+        </p:nvSpPr>
+        <p:spPr>
+          <a:xfrm>
+            <a:off x="2999232" y="2304288"/>
+            <a:ext cx="1417320" cy="347472"/>
+          </a:xfrm>
+          <a:prstGeom prst="roundRect">
+            <a:avLst/>
+          </a:prstGeom>
+          <a:solidFill>
+            <a:srgbClr val="FFF8D8"/>
+          </a:solidFill>
+          <a:ln w="13970">
+            <a:solidFill>
+              <a:srgbClr val="B07D12"/>
+            </a:solidFill>
+          </a:ln>
+        </p:spPr>
+        <p:style>
+          <a:lnRef idx="1">
+            <a:schemeClr val="accent1"/>
+          </a:lnRef>
+          <a:fillRef idx="3">
+            <a:schemeClr val="accent1"/>
+          </a:fillRef>
+          <a:effectRef idx="2">
+            <a:schemeClr val="accent1"/>
+          </a:effectRef>
+          <a:fontRef idx="minor">
+            <a:schemeClr val="lt1"/>
+          </a:fontRef>
+        </p:style>
+        <p:txBody>
+          <a:bodyPr rtlCol="0" anchor="ctr"/>
+          <a:lstStyle/>
+          <a:p>
+            <a:pPr algn="ctr"/>
+          </a:p>
+        </p:txBody>
+      </p:sp>
+      <p:sp>
+        <p:nvSpPr>
+          <p:cNvPr id="41" name="Rounded Rectangle 40"/>
+          <p:cNvSpPr/>
+          <p:nvPr/>
+        </p:nvSpPr>
+        <p:spPr>
+          <a:xfrm>
+            <a:off x="4663440" y="2304288"/>
+            <a:ext cx="1417320" cy="347472"/>
+          </a:xfrm>
+          <a:prstGeom prst="roundRect">
+            <a:avLst/>
+          </a:prstGeom>
+          <a:solidFill>
+            <a:srgbClr val="FFF0E2"/>
+          </a:solidFill>
+          <a:ln w="13970">
+            <a:solidFill>
+              <a:srgbClr val="C96A1B"/>
+            </a:solidFill>
+          </a:ln>
+        </p:spPr>
+        <p:style>
+          <a:lnRef idx="1">
+            <a:schemeClr val="accent1"/>
+          </a:lnRef>
+          <a:fillRef idx="3">
+            <a:schemeClr val="accent1"/>
+          </a:fillRef>
+          <a:effectRef idx="2">
+            <a:schemeClr val="accent1"/>
+          </a:effectRef>
+          <a:fontRef idx="minor">
+            <a:schemeClr val="lt1"/>
+          </a:fontRef>
+        </p:style>
+        <p:txBody>
+          <a:bodyPr rtlCol="0" anchor="ctr"/>
+          <a:lstStyle/>
+          <a:p>
+            <a:pPr algn="ctr"/>
+          </a:p>
+        </p:txBody>
+      </p:sp>
+      <p:sp>
+        <p:nvSpPr>
+          <p:cNvPr id="42" name="TextBox 41"/>
+          <p:cNvSpPr txBox="1"/>
+          <p:nvPr/>
+        </p:nvSpPr>
+        <p:spPr>
+          <a:xfrm>
+            <a:off x="3054096" y="2322576"/>
+            <a:ext cx="1307592" cy="256032"/>
+          </a:xfrm>
+          <a:prstGeom prst="rect">
+            <a:avLst/>
+          </a:prstGeom>
+          <a:noFill/>
+        </p:spPr>
+        <p:txBody>
+          <a:bodyPr wrap="square" anchor="ctr">
+            <a:spAutoFit/>
+          </a:bodyPr>
+          <a:lstStyle/>
+          <a:p>
+            <a:pPr algn="ctr"/>
+            <a:r>
+              <a:rPr sz="1070" b="1">
+                <a:solidFill>
+                  <a:srgbClr val="6B4E00"/>
+                </a:solidFill>
+                <a:latin typeface="Arial"/>
+              </a:rPr>
+              <a:t>Asymmetric Loss
+(ASL)</a:t>
+            </a:r>
+          </a:p>
+        </p:txBody>
+      </p:sp>
+      <p:sp>
+        <p:nvSpPr>
+          <p:cNvPr id="43" name="TextBox 42"/>
+          <p:cNvSpPr txBox="1"/>
+          <p:nvPr/>
+        </p:nvSpPr>
+        <p:spPr>
+          <a:xfrm>
+            <a:off x="4736592" y="2322576"/>
+            <a:ext cx="1271016" cy="256032"/>
+          </a:xfrm>
+          <a:prstGeom prst="rect">
+            <a:avLst/>
+          </a:prstGeom>
+          <a:noFill/>
+        </p:spPr>
+        <p:txBody>
+          <a:bodyPr wrap="square" anchor="ctr">
+            <a:spAutoFit/>
+          </a:bodyPr>
+          <a:lstStyle/>
+          <a:p>
+            <a:pPr algn="ctr"/>
+            <a:r>
+              <a:rPr sz="1019" b="1">
+                <a:solidFill>
+                  <a:srgbClr val="8A4B08"/>
+                </a:solidFill>
+                <a:latin typeface="Arial"/>
+              </a:rPr>
+              <a:t>Class Weights
++ Threshold Tune</a:t>
+            </a:r>
+          </a:p>
+        </p:txBody>
+      </p:sp>
+      <p:sp>
+        <p:nvSpPr>
+          <p:cNvPr id="44" name="Rectangle 43"/>
+          <p:cNvSpPr/>
+          <p:nvPr/>
+        </p:nvSpPr>
+        <p:spPr>
+          <a:xfrm>
+            <a:off x="3310128" y="3026664"/>
+            <a:ext cx="155448" cy="960120"/>
+          </a:xfrm>
+          <a:prstGeom prst="rect">
+            <a:avLst/>
+          </a:prstGeom>
+          <a:solidFill>
+            <a:srgbClr val="D7E7FF"/>
+          </a:solidFill>
+          <a:ln w="12700">
+            <a:solidFill>
+              <a:srgbClr val="6D8CCF"/>
+            </a:solidFill>
+          </a:ln>
+        </p:spPr>
+        <p:style>
+          <a:lnRef idx="1">
+            <a:schemeClr val="accent1"/>
+          </a:lnRef>
+          <a:fillRef idx="3">
+            <a:schemeClr val="accent1"/>
+          </a:fillRef>
+          <a:effectRef idx="2">
+            <a:schemeClr val="accent1"/>
+          </a:effectRef>
+          <a:fontRef idx="minor">
+            <a:schemeClr val="lt1"/>
+          </a:fontRef>
+        </p:style>
+        <p:txBody>
+          <a:bodyPr rtlCol="0" anchor="ctr"/>
+          <a:lstStyle/>
+          <a:p>
+            <a:pPr algn="ctr"/>
+          </a:p>
+        </p:txBody>
+      </p:sp>
+      <p:sp>
+        <p:nvSpPr>
+          <p:cNvPr id="45" name="Rectangle 44"/>
+          <p:cNvSpPr/>
+          <p:nvPr/>
+        </p:nvSpPr>
+        <p:spPr>
+          <a:xfrm>
+            <a:off x="3584448" y="3182112"/>
+            <a:ext cx="155448" cy="804672"/>
+          </a:xfrm>
+          <a:prstGeom prst="rect">
+            <a:avLst/>
+          </a:prstGeom>
+          <a:solidFill>
+            <a:srgbClr val="D7E7FF"/>
+          </a:solidFill>
+          <a:ln w="12700">
+            <a:solidFill>
+              <a:srgbClr val="6D8CCF"/>
+            </a:solidFill>
+          </a:ln>
+        </p:spPr>
+        <p:style>
+          <a:lnRef idx="1">
+            <a:schemeClr val="accent1"/>
+          </a:lnRef>
+          <a:fillRef idx="3">
+            <a:schemeClr val="accent1"/>
+          </a:fillRef>
+          <a:effectRef idx="2">
+            <a:schemeClr val="accent1"/>
+          </a:effectRef>
+          <a:fontRef idx="minor">
+            <a:schemeClr val="lt1"/>
+          </a:fontRef>
+        </p:style>
+        <p:txBody>
+          <a:bodyPr rtlCol="0" anchor="ctr"/>
+          <a:lstStyle/>
+          <a:p>
+            <a:pPr algn="ctr"/>
+          </a:p>
+        </p:txBody>
+      </p:sp>
+      <p:sp>
+        <p:nvSpPr>
+          <p:cNvPr id="46" name="Rectangle 45"/>
+          <p:cNvSpPr/>
+          <p:nvPr/>
+        </p:nvSpPr>
+        <p:spPr>
+          <a:xfrm>
+            <a:off x="3858768" y="3346704"/>
+            <a:ext cx="155448" cy="640080"/>
+          </a:xfrm>
+          <a:prstGeom prst="rect">
+            <a:avLst/>
+          </a:prstGeom>
+          <a:solidFill>
+            <a:srgbClr val="D7E7FF"/>
+          </a:solidFill>
+          <a:ln w="12700">
+            <a:solidFill>
+              <a:srgbClr val="6D8CCF"/>
+            </a:solidFill>
+          </a:ln>
+        </p:spPr>
+        <p:style>
+          <a:lnRef idx="1">
+            <a:schemeClr val="accent1"/>
+          </a:lnRef>
+          <a:fillRef idx="3">
+            <a:schemeClr val="accent1"/>
+          </a:fillRef>
+          <a:effectRef idx="2">
+            <a:schemeClr val="accent1"/>
+          </a:effectRef>
+          <a:fontRef idx="minor">
+            <a:schemeClr val="lt1"/>
+          </a:fontRef>
+        </p:style>
+        <p:txBody>
+          <a:bodyPr rtlCol="0" anchor="ctr"/>
+          <a:lstStyle/>
+          <a:p>
+            <a:pPr algn="ctr"/>
+          </a:p>
+        </p:txBody>
+      </p:sp>
+      <p:sp>
+        <p:nvSpPr>
+          <p:cNvPr id="47" name="Rectangle 46"/>
+          <p:cNvSpPr/>
+          <p:nvPr/>
+        </p:nvSpPr>
+        <p:spPr>
+          <a:xfrm>
+            <a:off x="4133088" y="3529584"/>
+            <a:ext cx="155448" cy="457200"/>
+          </a:xfrm>
+          <a:prstGeom prst="rect">
+            <a:avLst/>
+          </a:prstGeom>
+          <a:solidFill>
+            <a:srgbClr val="D7E7FF"/>
+          </a:solidFill>
+          <a:ln w="12700">
+            <a:solidFill>
+              <a:srgbClr val="6D8CCF"/>
+            </a:solidFill>
+          </a:ln>
+        </p:spPr>
+        <p:style>
+          <a:lnRef idx="1">
+            <a:schemeClr val="accent1"/>
+          </a:lnRef>
+          <a:fillRef idx="3">
+            <a:schemeClr val="accent1"/>
+          </a:fillRef>
+          <a:effectRef idx="2">
+            <a:schemeClr val="accent1"/>
+          </a:effectRef>
+          <a:fontRef idx="minor">
+            <a:schemeClr val="lt1"/>
+          </a:fontRef>
+        </p:style>
+        <p:txBody>
+          <a:bodyPr rtlCol="0" anchor="ctr"/>
+          <a:lstStyle/>
+          <a:p>
+            <a:pPr algn="ctr"/>
+          </a:p>
+        </p:txBody>
+      </p:sp>
+      <p:sp>
+        <p:nvSpPr>
+          <p:cNvPr id="48" name="Rounded Rectangle 47"/>
+          <p:cNvSpPr/>
+          <p:nvPr/>
+        </p:nvSpPr>
+        <p:spPr>
+          <a:xfrm>
+            <a:off x="4645152" y="3557016"/>
+            <a:ext cx="347472" cy="292608"/>
+          </a:xfrm>
+          <a:prstGeom prst="roundRect">
+            <a:avLst/>
+          </a:prstGeom>
+          <a:solidFill>
+            <a:srgbClr val="C9D8F7"/>
+          </a:solidFill>
+          <a:ln w="12700">
+            <a:solidFill>
+              <a:srgbClr val="6D8CCF"/>
+            </a:solidFill>
+          </a:ln>
+        </p:spPr>
+        <p:style>
+          <a:lnRef idx="1">
+            <a:schemeClr val="accent1"/>
+          </a:lnRef>
+          <a:fillRef idx="3">
+            <a:schemeClr val="accent1"/>
+          </a:fillRef>
+          <a:effectRef idx="2">
+            <a:schemeClr val="accent1"/>
+          </a:effectRef>
+          <a:fontRef idx="minor">
+            <a:schemeClr val="lt1"/>
+          </a:fontRef>
+        </p:style>
+        <p:txBody>
+          <a:bodyPr rtlCol="0" anchor="ctr"/>
+          <a:lstStyle/>
+          <a:p>
+            <a:pPr algn="ctr"/>
+          </a:p>
+        </p:txBody>
+      </p:sp>
+      <p:sp>
+        <p:nvSpPr>
+          <p:cNvPr id="49" name="Rectangle 48"/>
+          <p:cNvSpPr/>
+          <p:nvPr/>
+        </p:nvSpPr>
+        <p:spPr>
+          <a:xfrm>
+            <a:off x="5230368" y="3529584"/>
+            <a:ext cx="155448" cy="457200"/>
+          </a:xfrm>
+          <a:prstGeom prst="rect">
+            <a:avLst/>
+          </a:prstGeom>
+          <a:solidFill>
+            <a:srgbClr val="D7E7FF"/>
+          </a:solidFill>
+          <a:ln w="12700">
+            <a:solidFill>
+              <a:srgbClr val="6D8CCF"/>
+            </a:solidFill>
+          </a:ln>
+        </p:spPr>
+        <p:style>
+          <a:lnRef idx="1">
+            <a:schemeClr val="accent1"/>
+          </a:lnRef>
+          <a:fillRef idx="3">
+            <a:schemeClr val="accent1"/>
+          </a:fillRef>
+          <a:effectRef idx="2">
+            <a:schemeClr val="accent1"/>
+          </a:effectRef>
+          <a:fontRef idx="minor">
+            <a:schemeClr val="lt1"/>
+          </a:fontRef>
+        </p:style>
+        <p:txBody>
+          <a:bodyPr rtlCol="0" anchor="ctr"/>
+          <a:lstStyle/>
+          <a:p>
+            <a:pPr algn="ctr"/>
+          </a:p>
+        </p:txBody>
+      </p:sp>
+      <p:sp>
+        <p:nvSpPr>
+          <p:cNvPr id="50" name="Rectangle 49"/>
+          <p:cNvSpPr/>
+          <p:nvPr/>
+        </p:nvSpPr>
+        <p:spPr>
+          <a:xfrm>
+            <a:off x="5504688" y="3346704"/>
+            <a:ext cx="155448" cy="640080"/>
+          </a:xfrm>
+          <a:prstGeom prst="rect">
+            <a:avLst/>
+          </a:prstGeom>
+          <a:solidFill>
+            <a:srgbClr val="D7E7FF"/>
+          </a:solidFill>
+          <a:ln w="12700">
+            <a:solidFill>
+              <a:srgbClr val="6D8CCF"/>
+            </a:solidFill>
+          </a:ln>
+        </p:spPr>
+        <p:style>
+          <a:lnRef idx="1">
+            <a:schemeClr val="accent1"/>
+          </a:lnRef>
+          <a:fillRef idx="3">
+            <a:schemeClr val="accent1"/>
+          </a:fillRef>
+          <a:effectRef idx="2">
+            <a:schemeClr val="accent1"/>
+          </a:effectRef>
+          <a:fontRef idx="minor">
+            <a:schemeClr val="lt1"/>
+          </a:fontRef>
+        </p:style>
+        <p:txBody>
+          <a:bodyPr rtlCol="0" anchor="ctr"/>
+          <a:lstStyle/>
+          <a:p>
+            <a:pPr algn="ctr"/>
+          </a:p>
+        </p:txBody>
+      </p:sp>
+      <p:sp>
+        <p:nvSpPr>
+          <p:cNvPr id="51" name="Rectangle 50"/>
+          <p:cNvSpPr/>
+          <p:nvPr/>
+        </p:nvSpPr>
+        <p:spPr>
+          <a:xfrm>
+            <a:off x="5779008" y="3182112"/>
+            <a:ext cx="155448" cy="804672"/>
+          </a:xfrm>
+          <a:prstGeom prst="rect">
+            <a:avLst/>
+          </a:prstGeom>
+          <a:solidFill>
+            <a:srgbClr val="D7E7FF"/>
+          </a:solidFill>
+          <a:ln w="12700">
+            <a:solidFill>
+              <a:srgbClr val="6D8CCF"/>
+            </a:solidFill>
+          </a:ln>
+        </p:spPr>
+        <p:style>
+          <a:lnRef idx="1">
+            <a:schemeClr val="accent1"/>
+          </a:lnRef>
+          <a:fillRef idx="3">
+            <a:schemeClr val="accent1"/>
+          </a:fillRef>
+          <a:effectRef idx="2">
+            <a:schemeClr val="accent1"/>
+          </a:effectRef>
+          <a:fontRef idx="minor">
+            <a:schemeClr val="lt1"/>
+          </a:fontRef>
+        </p:style>
+        <p:txBody>
+          <a:bodyPr rtlCol="0" anchor="ctr"/>
+          <a:lstStyle/>
+          <a:p>
+            <a:pPr algn="ctr"/>
+          </a:p>
+        </p:txBody>
+      </p:sp>
+      <p:sp>
+        <p:nvSpPr>
+          <p:cNvPr id="52" name="Rectangle 51"/>
+          <p:cNvSpPr/>
+          <p:nvPr/>
+        </p:nvSpPr>
+        <p:spPr>
+          <a:xfrm>
+            <a:off x="6053328" y="3026664"/>
+            <a:ext cx="155448" cy="960120"/>
+          </a:xfrm>
+          <a:prstGeom prst="rect">
+            <a:avLst/>
+          </a:prstGeom>
+          <a:solidFill>
+            <a:srgbClr val="D7E7FF"/>
+          </a:solidFill>
+          <a:ln w="12700">
+            <a:solidFill>
+              <a:srgbClr val="6D8CCF"/>
+            </a:solidFill>
+          </a:ln>
+        </p:spPr>
+        <p:style>
+          <a:lnRef idx="1">
+            <a:schemeClr val="accent1"/>
+          </a:lnRef>
+          <a:fillRef idx="3">
+            <a:schemeClr val="accent1"/>
+          </a:fillRef>
+          <a:effectRef idx="2">
+            <a:schemeClr val="accent1"/>
+          </a:effectRef>
+          <a:fontRef idx="minor">
+            <a:schemeClr val="lt1"/>
+          </a:fontRef>
+        </p:style>
+        <p:txBody>
+          <a:bodyPr rtlCol="0" anchor="ctr"/>
+          <a:lstStyle/>
+          <a:p>
+            <a:pPr algn="ctr"/>
+          </a:p>
+        </p:txBody>
+      </p:sp>
+      <p:sp>
+        <p:nvSpPr>
+          <p:cNvPr id="53" name="TextBox 52"/>
+          <p:cNvSpPr txBox="1"/>
+          <p:nvPr/>
+        </p:nvSpPr>
+        <p:spPr>
+          <a:xfrm>
+            <a:off x="3749040" y="4169664"/>
+            <a:ext cx="2331720" cy="365760"/>
+          </a:xfrm>
+          <a:prstGeom prst="rect">
+            <a:avLst/>
+          </a:prstGeom>
+          <a:noFill/>
+        </p:spPr>
+        <p:txBody>
+          <a:bodyPr wrap="square" anchor="ctr">
+            <a:spAutoFit/>
+          </a:bodyPr>
+          <a:lstStyle/>
+          <a:p>
+            <a:pPr algn="ctr"/>
+            <a:r>
+              <a:rPr sz="1400" b="1">
+                <a:solidFill>
+                  <a:srgbClr val="1F2937"/>
+                </a:solidFill>
+                <a:latin typeface="Arial"/>
+              </a:rPr>
+              <a:t>DeBERTa-v3 fine-tuning core</a:t>
+            </a:r>
+          </a:p>
+        </p:txBody>
+      </p:sp>
+      <p:sp>
+        <p:nvSpPr>
+          <p:cNvPr id="54" name="TextBox 53"/>
+          <p:cNvSpPr txBox="1"/>
+          <p:nvPr/>
+        </p:nvSpPr>
+        <p:spPr>
+          <a:xfrm>
+            <a:off x="3913632" y="4425696"/>
+            <a:ext cx="1993392" cy="219456"/>
+          </a:xfrm>
+          <a:prstGeom prst="rect">
+            <a:avLst/>
+          </a:prstGeom>
+          <a:noFill/>
+        </p:spPr>
+        <p:txBody>
+          <a:bodyPr wrap="square" anchor="ctr">
+            <a:spAutoFit/>
+          </a:bodyPr>
+          <a:lstStyle/>
+          <a:p>
+            <a:pPr algn="ctr"/>
+            <a:r>
+              <a:rPr sz="1040" b="0">
                 <a:solidFill>
                   <a:srgbClr val="004080"/>
                 </a:solidFill>
                 <a:latin typeface="Arial"/>
               </a:rPr>
-              <a:t>Stage 0</a:t>
-            </a:r>
-          </a:p>
-        </p:txBody>
-      </p:sp>
-      <p:sp>
-        <p:nvSpPr>
-          <p:cNvPr id="6" name="TextBox 5"/>
+              <a:t>encoder backbone + multilabel head</a:t>
+            </a:r>
+          </a:p>
+        </p:txBody>
+      </p:sp>
+      <p:sp>
+        <p:nvSpPr>
+          <p:cNvPr id="55" name="Rectangle 54"/>
+          <p:cNvSpPr/>
+          <p:nvPr/>
+        </p:nvSpPr>
+        <p:spPr>
+          <a:xfrm>
+            <a:off x="4279392" y="5010912"/>
+            <a:ext cx="219456" cy="219456"/>
+          </a:xfrm>
+          <a:prstGeom prst="rect">
+            <a:avLst/>
+          </a:prstGeom>
+          <a:solidFill>
+            <a:srgbClr val="FF9F2F"/>
+          </a:solidFill>
+          <a:ln w="12700">
+            <a:solidFill>
+              <a:srgbClr val="C96A1B"/>
+            </a:solidFill>
+          </a:ln>
+        </p:spPr>
+        <p:style>
+          <a:lnRef idx="1">
+            <a:schemeClr val="accent1"/>
+          </a:lnRef>
+          <a:fillRef idx="3">
+            <a:schemeClr val="accent1"/>
+          </a:fillRef>
+          <a:effectRef idx="2">
+            <a:schemeClr val="accent1"/>
+          </a:effectRef>
+          <a:fontRef idx="minor">
+            <a:schemeClr val="lt1"/>
+          </a:fontRef>
+        </p:style>
+        <p:txBody>
+          <a:bodyPr rtlCol="0" anchor="ctr"/>
+          <a:lstStyle/>
+          <a:p>
+            <a:pPr algn="ctr"/>
+          </a:p>
+        </p:txBody>
+      </p:sp>
+      <p:sp>
+        <p:nvSpPr>
+          <p:cNvPr id="56" name="Rectangle 55"/>
+          <p:cNvSpPr/>
+          <p:nvPr/>
+        </p:nvSpPr>
+        <p:spPr>
+          <a:xfrm>
+            <a:off x="4590288" y="5010912"/>
+            <a:ext cx="219456" cy="219456"/>
+          </a:xfrm>
+          <a:prstGeom prst="rect">
+            <a:avLst/>
+          </a:prstGeom>
+          <a:solidFill>
+            <a:srgbClr val="FF9F2F"/>
+          </a:solidFill>
+          <a:ln w="12700">
+            <a:solidFill>
+              <a:srgbClr val="C96A1B"/>
+            </a:solidFill>
+          </a:ln>
+        </p:spPr>
+        <p:style>
+          <a:lnRef idx="1">
+            <a:schemeClr val="accent1"/>
+          </a:lnRef>
+          <a:fillRef idx="3">
+            <a:schemeClr val="accent1"/>
+          </a:fillRef>
+          <a:effectRef idx="2">
+            <a:schemeClr val="accent1"/>
+          </a:effectRef>
+          <a:fontRef idx="minor">
+            <a:schemeClr val="lt1"/>
+          </a:fontRef>
+        </p:style>
+        <p:txBody>
+          <a:bodyPr rtlCol="0" anchor="ctr"/>
+          <a:lstStyle/>
+          <a:p>
+            <a:pPr algn="ctr"/>
+          </a:p>
+        </p:txBody>
+      </p:sp>
+      <p:sp>
+        <p:nvSpPr>
+          <p:cNvPr id="57" name="Rectangle 56"/>
+          <p:cNvSpPr/>
+          <p:nvPr/>
+        </p:nvSpPr>
+        <p:spPr>
+          <a:xfrm>
+            <a:off x="4901184" y="5010912"/>
+            <a:ext cx="219456" cy="219456"/>
+          </a:xfrm>
+          <a:prstGeom prst="rect">
+            <a:avLst/>
+          </a:prstGeom>
+          <a:solidFill>
+            <a:srgbClr val="FF9F2F"/>
+          </a:solidFill>
+          <a:ln w="12700">
+            <a:solidFill>
+              <a:srgbClr val="C96A1B"/>
+            </a:solidFill>
+          </a:ln>
+        </p:spPr>
+        <p:style>
+          <a:lnRef idx="1">
+            <a:schemeClr val="accent1"/>
+          </a:lnRef>
+          <a:fillRef idx="3">
+            <a:schemeClr val="accent1"/>
+          </a:fillRef>
+          <a:effectRef idx="2">
+            <a:schemeClr val="accent1"/>
+          </a:effectRef>
+          <a:fontRef idx="minor">
+            <a:schemeClr val="lt1"/>
+          </a:fontRef>
+        </p:style>
+        <p:txBody>
+          <a:bodyPr rtlCol="0" anchor="ctr"/>
+          <a:lstStyle/>
+          <a:p>
+            <a:pPr algn="ctr"/>
+          </a:p>
+        </p:txBody>
+      </p:sp>
+      <p:sp>
+        <p:nvSpPr>
+          <p:cNvPr id="58" name="Rectangle 57"/>
+          <p:cNvSpPr/>
+          <p:nvPr/>
+        </p:nvSpPr>
+        <p:spPr>
+          <a:xfrm>
+            <a:off x="4279392" y="5321808"/>
+            <a:ext cx="219456" cy="219456"/>
+          </a:xfrm>
+          <a:prstGeom prst="rect">
+            <a:avLst/>
+          </a:prstGeom>
+          <a:solidFill>
+            <a:srgbClr val="FF9F2F"/>
+          </a:solidFill>
+          <a:ln w="12700">
+            <a:solidFill>
+              <a:srgbClr val="C96A1B"/>
+            </a:solidFill>
+          </a:ln>
+        </p:spPr>
+        <p:style>
+          <a:lnRef idx="1">
+            <a:schemeClr val="accent1"/>
+          </a:lnRef>
+          <a:fillRef idx="3">
+            <a:schemeClr val="accent1"/>
+          </a:fillRef>
+          <a:effectRef idx="2">
+            <a:schemeClr val="accent1"/>
+          </a:effectRef>
+          <a:fontRef idx="minor">
+            <a:schemeClr val="lt1"/>
+          </a:fontRef>
+        </p:style>
+        <p:txBody>
+          <a:bodyPr rtlCol="0" anchor="ctr"/>
+          <a:lstStyle/>
+          <a:p>
+            <a:pPr algn="ctr"/>
+          </a:p>
+        </p:txBody>
+      </p:sp>
+      <p:sp>
+        <p:nvSpPr>
+          <p:cNvPr id="59" name="Rectangle 58"/>
+          <p:cNvSpPr/>
+          <p:nvPr/>
+        </p:nvSpPr>
+        <p:spPr>
+          <a:xfrm>
+            <a:off x="4590288" y="5321808"/>
+            <a:ext cx="219456" cy="219456"/>
+          </a:xfrm>
+          <a:prstGeom prst="rect">
+            <a:avLst/>
+          </a:prstGeom>
+          <a:solidFill>
+            <a:srgbClr val="FF9F2F"/>
+          </a:solidFill>
+          <a:ln w="12700">
+            <a:solidFill>
+              <a:srgbClr val="C96A1B"/>
+            </a:solidFill>
+          </a:ln>
+        </p:spPr>
+        <p:style>
+          <a:lnRef idx="1">
+            <a:schemeClr val="accent1"/>
+          </a:lnRef>
+          <a:fillRef idx="3">
+            <a:schemeClr val="accent1"/>
+          </a:fillRef>
+          <a:effectRef idx="2">
+            <a:schemeClr val="accent1"/>
+          </a:effectRef>
+          <a:fontRef idx="minor">
+            <a:schemeClr val="lt1"/>
+          </a:fontRef>
+        </p:style>
+        <p:txBody>
+          <a:bodyPr rtlCol="0" anchor="ctr"/>
+          <a:lstStyle/>
+          <a:p>
+            <a:pPr algn="ctr"/>
+          </a:p>
+        </p:txBody>
+      </p:sp>
+      <p:sp>
+        <p:nvSpPr>
+          <p:cNvPr id="60" name="Rectangle 59"/>
+          <p:cNvSpPr/>
+          <p:nvPr/>
+        </p:nvSpPr>
+        <p:spPr>
+          <a:xfrm>
+            <a:off x="4901184" y="5321808"/>
+            <a:ext cx="219456" cy="219456"/>
+          </a:xfrm>
+          <a:prstGeom prst="rect">
+            <a:avLst/>
+          </a:prstGeom>
+          <a:solidFill>
+            <a:srgbClr val="FF9F2F"/>
+          </a:solidFill>
+          <a:ln w="12700">
+            <a:solidFill>
+              <a:srgbClr val="C96A1B"/>
+            </a:solidFill>
+          </a:ln>
+        </p:spPr>
+        <p:style>
+          <a:lnRef idx="1">
+            <a:schemeClr val="accent1"/>
+          </a:lnRef>
+          <a:fillRef idx="3">
+            <a:schemeClr val="accent1"/>
+          </a:fillRef>
+          <a:effectRef idx="2">
+            <a:schemeClr val="accent1"/>
+          </a:effectRef>
+          <a:fontRef idx="minor">
+            <a:schemeClr val="lt1"/>
+          </a:fontRef>
+        </p:style>
+        <p:txBody>
+          <a:bodyPr rtlCol="0" anchor="ctr"/>
+          <a:lstStyle/>
+          <a:p>
+            <a:pPr algn="ctr"/>
+          </a:p>
+        </p:txBody>
+      </p:sp>
+      <p:sp>
+        <p:nvSpPr>
+          <p:cNvPr id="61" name="Rectangle 60"/>
+          <p:cNvSpPr/>
+          <p:nvPr/>
+        </p:nvSpPr>
+        <p:spPr>
+          <a:xfrm>
+            <a:off x="5212080" y="5321808"/>
+            <a:ext cx="219456" cy="219456"/>
+          </a:xfrm>
+          <a:prstGeom prst="rect">
+            <a:avLst/>
+          </a:prstGeom>
+          <a:solidFill>
+            <a:srgbClr val="FF9F2F"/>
+          </a:solidFill>
+          <a:ln w="12700">
+            <a:solidFill>
+              <a:srgbClr val="C96A1B"/>
+            </a:solidFill>
+          </a:ln>
+        </p:spPr>
+        <p:style>
+          <a:lnRef idx="1">
+            <a:schemeClr val="accent1"/>
+          </a:lnRef>
+          <a:fillRef idx="3">
+            <a:schemeClr val="accent1"/>
+          </a:fillRef>
+          <a:effectRef idx="2">
+            <a:schemeClr val="accent1"/>
+          </a:effectRef>
+          <a:fontRef idx="minor">
+            <a:schemeClr val="lt1"/>
+          </a:fontRef>
+        </p:style>
+        <p:txBody>
+          <a:bodyPr rtlCol="0" anchor="ctr"/>
+          <a:lstStyle/>
+          <a:p>
+            <a:pPr algn="ctr"/>
+          </a:p>
+        </p:txBody>
+      </p:sp>
+      <p:sp>
+        <p:nvSpPr>
+          <p:cNvPr id="62" name="Rounded Rectangle 61"/>
+          <p:cNvSpPr/>
+          <p:nvPr/>
+        </p:nvSpPr>
+        <p:spPr>
+          <a:xfrm>
+            <a:off x="3611880" y="5998464"/>
+            <a:ext cx="2615184" cy="841248"/>
+          </a:xfrm>
+          <a:prstGeom prst="roundRect">
+            <a:avLst/>
+          </a:prstGeom>
+          <a:solidFill>
+            <a:srgbClr val="FFF8D8"/>
+          </a:solidFill>
+          <a:ln w="16510">
+            <a:solidFill>
+              <a:srgbClr val="D3B35A"/>
+            </a:solidFill>
+          </a:ln>
+        </p:spPr>
+        <p:style>
+          <a:lnRef idx="1">
+            <a:schemeClr val="accent1"/>
+          </a:lnRef>
+          <a:fillRef idx="3">
+            <a:schemeClr val="accent1"/>
+          </a:fillRef>
+          <a:effectRef idx="2">
+            <a:schemeClr val="accent1"/>
+          </a:effectRef>
+          <a:fontRef idx="minor">
+            <a:schemeClr val="lt1"/>
+          </a:fontRef>
+        </p:style>
+        <p:txBody>
+          <a:bodyPr rtlCol="0" anchor="ctr"/>
+          <a:lstStyle/>
+          <a:p>
+            <a:pPr algn="ctr"/>
+          </a:p>
+        </p:txBody>
+      </p:sp>
+      <p:sp>
+        <p:nvSpPr>
+          <p:cNvPr id="63" name="TextBox 62"/>
           <p:cNvSpPr txBox="1"/>
           <p:nvPr/>
         </p:nvSpPr>
         <p:spPr>
           <a:xfrm>
-            <a:off x="329184" y="2660904"/>
-            <a:ext cx="1426464" cy="310896"/>
+            <a:off x="3803904" y="6181344"/>
+            <a:ext cx="2231136" cy="347472"/>
           </a:xfrm>
           <a:prstGeom prst="rect">
             <a:avLst/>
@@ -3270,27 +5657,333 @@
           <a:p>
             <a:pPr algn="ctr"/>
             <a:r>
-              <a:rPr sz="1500" b="1">
+              <a:rPr sz="1200" b="1">
+                <a:solidFill>
+                  <a:srgbClr val="6B4E00"/>
+                </a:solidFill>
+                <a:latin typeface="Arial"/>
+              </a:rPr>
+              <a:t>Threshold optimization layer
+(validation-only per-class tuning)</a:t>
+            </a:r>
+          </a:p>
+        </p:txBody>
+      </p:sp>
+      <p:sp>
+        <p:nvSpPr>
+          <p:cNvPr id="64" name="Rounded Rectangle 63"/>
+          <p:cNvSpPr/>
+          <p:nvPr/>
+        </p:nvSpPr>
+        <p:spPr>
+          <a:xfrm>
+            <a:off x="6583680" y="6016752"/>
+            <a:ext cx="1847088" cy="749808"/>
+          </a:xfrm>
+          <a:prstGeom prst="roundRect">
+            <a:avLst/>
+          </a:prstGeom>
+          <a:solidFill>
+            <a:srgbClr val="F8FAFC"/>
+          </a:solidFill>
+          <a:ln w="15240">
+            <a:solidFill>
+              <a:srgbClr val="8A8F98"/>
+            </a:solidFill>
+          </a:ln>
+        </p:spPr>
+        <p:style>
+          <a:lnRef idx="1">
+            <a:schemeClr val="accent1"/>
+          </a:lnRef>
+          <a:fillRef idx="3">
+            <a:schemeClr val="accent1"/>
+          </a:fillRef>
+          <a:effectRef idx="2">
+            <a:schemeClr val="accent1"/>
+          </a:effectRef>
+          <a:fontRef idx="minor">
+            <a:schemeClr val="lt1"/>
+          </a:fontRef>
+        </p:style>
+        <p:txBody>
+          <a:bodyPr rtlCol="0" anchor="ctr"/>
+          <a:lstStyle/>
+          <a:p>
+            <a:pPr algn="ctr"/>
+          </a:p>
+        </p:txBody>
+      </p:sp>
+      <p:sp>
+        <p:nvSpPr>
+          <p:cNvPr id="65" name="Oval 64"/>
+          <p:cNvSpPr/>
+          <p:nvPr/>
+        </p:nvSpPr>
+        <p:spPr>
+          <a:xfrm>
+            <a:off x="6729984" y="6236208"/>
+            <a:ext cx="137160" cy="137160"/>
+          </a:xfrm>
+          <a:prstGeom prst="ellipse">
+            <a:avLst/>
+          </a:prstGeom>
+          <a:solidFill>
+            <a:srgbClr val="FFB84D"/>
+          </a:solidFill>
+          <a:ln w="12700">
+            <a:solidFill>
+              <a:srgbClr val="C98712"/>
+            </a:solidFill>
+          </a:ln>
+        </p:spPr>
+        <p:style>
+          <a:lnRef idx="1">
+            <a:schemeClr val="accent1"/>
+          </a:lnRef>
+          <a:fillRef idx="3">
+            <a:schemeClr val="accent1"/>
+          </a:fillRef>
+          <a:effectRef idx="2">
+            <a:schemeClr val="accent1"/>
+          </a:effectRef>
+          <a:fontRef idx="minor">
+            <a:schemeClr val="lt1"/>
+          </a:fontRef>
+        </p:style>
+        <p:txBody>
+          <a:bodyPr rtlCol="0" anchor="ctr"/>
+          <a:lstStyle/>
+          <a:p>
+            <a:pPr algn="ctr"/>
+          </a:p>
+        </p:txBody>
+      </p:sp>
+      <p:sp>
+        <p:nvSpPr>
+          <p:cNvPr id="66" name="Oval 65"/>
+          <p:cNvSpPr/>
+          <p:nvPr/>
+        </p:nvSpPr>
+        <p:spPr>
+          <a:xfrm>
+            <a:off x="6986016" y="6236208"/>
+            <a:ext cx="137160" cy="137160"/>
+          </a:xfrm>
+          <a:prstGeom prst="ellipse">
+            <a:avLst/>
+          </a:prstGeom>
+          <a:solidFill>
+            <a:srgbClr val="FFB84D"/>
+          </a:solidFill>
+          <a:ln w="12700">
+            <a:solidFill>
+              <a:srgbClr val="C98712"/>
+            </a:solidFill>
+          </a:ln>
+        </p:spPr>
+        <p:style>
+          <a:lnRef idx="1">
+            <a:schemeClr val="accent1"/>
+          </a:lnRef>
+          <a:fillRef idx="3">
+            <a:schemeClr val="accent1"/>
+          </a:fillRef>
+          <a:effectRef idx="2">
+            <a:schemeClr val="accent1"/>
+          </a:effectRef>
+          <a:fontRef idx="minor">
+            <a:schemeClr val="lt1"/>
+          </a:fontRef>
+        </p:style>
+        <p:txBody>
+          <a:bodyPr rtlCol="0" anchor="ctr"/>
+          <a:lstStyle/>
+          <a:p>
+            <a:pPr algn="ctr"/>
+          </a:p>
+        </p:txBody>
+      </p:sp>
+      <p:sp>
+        <p:nvSpPr>
+          <p:cNvPr id="67" name="Oval 66"/>
+          <p:cNvSpPr/>
+          <p:nvPr/>
+        </p:nvSpPr>
+        <p:spPr>
+          <a:xfrm>
+            <a:off x="7242048" y="6236208"/>
+            <a:ext cx="137160" cy="137160"/>
+          </a:xfrm>
+          <a:prstGeom prst="ellipse">
+            <a:avLst/>
+          </a:prstGeom>
+          <a:solidFill>
+            <a:srgbClr val="FFB84D"/>
+          </a:solidFill>
+          <a:ln w="12700">
+            <a:solidFill>
+              <a:srgbClr val="C98712"/>
+            </a:solidFill>
+          </a:ln>
+        </p:spPr>
+        <p:style>
+          <a:lnRef idx="1">
+            <a:schemeClr val="accent1"/>
+          </a:lnRef>
+          <a:fillRef idx="3">
+            <a:schemeClr val="accent1"/>
+          </a:fillRef>
+          <a:effectRef idx="2">
+            <a:schemeClr val="accent1"/>
+          </a:effectRef>
+          <a:fontRef idx="minor">
+            <a:schemeClr val="lt1"/>
+          </a:fontRef>
+        </p:style>
+        <p:txBody>
+          <a:bodyPr rtlCol="0" anchor="ctr"/>
+          <a:lstStyle/>
+          <a:p>
+            <a:pPr algn="ctr"/>
+          </a:p>
+        </p:txBody>
+      </p:sp>
+      <p:sp>
+        <p:nvSpPr>
+          <p:cNvPr id="68" name="Oval 67"/>
+          <p:cNvSpPr/>
+          <p:nvPr/>
+        </p:nvSpPr>
+        <p:spPr>
+          <a:xfrm>
+            <a:off x="7498080" y="6236208"/>
+            <a:ext cx="137160" cy="137160"/>
+          </a:xfrm>
+          <a:prstGeom prst="ellipse">
+            <a:avLst/>
+          </a:prstGeom>
+          <a:solidFill>
+            <a:srgbClr val="FFB84D"/>
+          </a:solidFill>
+          <a:ln w="12700">
+            <a:solidFill>
+              <a:srgbClr val="C98712"/>
+            </a:solidFill>
+          </a:ln>
+        </p:spPr>
+        <p:style>
+          <a:lnRef idx="1">
+            <a:schemeClr val="accent1"/>
+          </a:lnRef>
+          <a:fillRef idx="3">
+            <a:schemeClr val="accent1"/>
+          </a:fillRef>
+          <a:effectRef idx="2">
+            <a:schemeClr val="accent1"/>
+          </a:effectRef>
+          <a:fontRef idx="minor">
+            <a:schemeClr val="lt1"/>
+          </a:fontRef>
+        </p:style>
+        <p:txBody>
+          <a:bodyPr rtlCol="0" anchor="ctr"/>
+          <a:lstStyle/>
+          <a:p>
+            <a:pPr algn="ctr"/>
+          </a:p>
+        </p:txBody>
+      </p:sp>
+      <p:sp>
+        <p:nvSpPr>
+          <p:cNvPr id="69" name="Oval 68"/>
+          <p:cNvSpPr/>
+          <p:nvPr/>
+        </p:nvSpPr>
+        <p:spPr>
+          <a:xfrm>
+            <a:off x="7754112" y="6236208"/>
+            <a:ext cx="137160" cy="137160"/>
+          </a:xfrm>
+          <a:prstGeom prst="ellipse">
+            <a:avLst/>
+          </a:prstGeom>
+          <a:solidFill>
+            <a:srgbClr val="FFB84D"/>
+          </a:solidFill>
+          <a:ln w="12700">
+            <a:solidFill>
+              <a:srgbClr val="C98712"/>
+            </a:solidFill>
+          </a:ln>
+        </p:spPr>
+        <p:style>
+          <a:lnRef idx="1">
+            <a:schemeClr val="accent1"/>
+          </a:lnRef>
+          <a:fillRef idx="3">
+            <a:schemeClr val="accent1"/>
+          </a:fillRef>
+          <a:effectRef idx="2">
+            <a:schemeClr val="accent1"/>
+          </a:effectRef>
+          <a:fontRef idx="minor">
+            <a:schemeClr val="lt1"/>
+          </a:fontRef>
+        </p:style>
+        <p:txBody>
+          <a:bodyPr rtlCol="0" anchor="ctr"/>
+          <a:lstStyle/>
+          <a:p>
+            <a:pPr algn="ctr"/>
+          </a:p>
+        </p:txBody>
+      </p:sp>
+      <p:sp>
+        <p:nvSpPr>
+          <p:cNvPr id="70" name="TextBox 69"/>
+          <p:cNvSpPr txBox="1"/>
+          <p:nvPr/>
+        </p:nvSpPr>
+        <p:spPr>
+          <a:xfrm>
+            <a:off x="8028432" y="6163056"/>
+            <a:ext cx="274320" cy="201168"/>
+          </a:xfrm>
+          <a:prstGeom prst="rect">
+            <a:avLst/>
+          </a:prstGeom>
+          <a:noFill/>
+        </p:spPr>
+        <p:txBody>
+          <a:bodyPr wrap="square" anchor="ctr">
+            <a:spAutoFit/>
+          </a:bodyPr>
+          <a:lstStyle/>
+          <a:p>
+            <a:pPr algn="ctr"/>
+            <a:r>
+              <a:rPr sz="1800" b="1">
                 <a:solidFill>
                   <a:srgbClr val="1F2937"/>
                 </a:solidFill>
                 <a:latin typeface="Arial"/>
               </a:rPr>
-              <a:t>Bootstrap</a:t>
-            </a:r>
-          </a:p>
-        </p:txBody>
-      </p:sp>
-      <p:sp>
-        <p:nvSpPr>
-          <p:cNvPr id="7" name="TextBox 6"/>
+              <a:t>...</a:t>
+            </a:r>
+          </a:p>
+        </p:txBody>
+      </p:sp>
+      <p:sp>
+        <p:nvSpPr>
+          <p:cNvPr id="71" name="TextBox 70"/>
           <p:cNvSpPr txBox="1"/>
           <p:nvPr/>
         </p:nvSpPr>
         <p:spPr>
           <a:xfrm>
-            <a:off x="347472" y="3090672"/>
-            <a:ext cx="1389888" cy="420624"/>
+            <a:off x="6784848" y="6473952"/>
+            <a:ext cx="1417320" cy="164592"/>
           </a:xfrm>
           <a:prstGeom prst="rect">
             <a:avLst/>
@@ -3305,37 +5998,37 @@
           <a:p>
             <a:pPr algn="ctr"/>
             <a:r>
-              <a:rPr sz="1050" b="0">
+              <a:rPr sz="980" b="0">
                 <a:solidFill>
                   <a:srgbClr val="1F2937"/>
                 </a:solidFill>
                 <a:latin typeface="Arial"/>
               </a:rPr>
-              <a:t>Environment setup</a:t>
-            </a:r>
-          </a:p>
-        </p:txBody>
-      </p:sp>
-      <p:sp>
-        <p:nvSpPr>
-          <p:cNvPr id="8" name="Rounded Rectangle 7"/>
+              <a:t>7-d probability vector</a:t>
+            </a:r>
+          </a:p>
+        </p:txBody>
+      </p:sp>
+      <p:sp>
+        <p:nvSpPr>
+          <p:cNvPr id="72" name="Rounded Rectangle 71"/>
           <p:cNvSpPr/>
           <p:nvPr/>
         </p:nvSpPr>
         <p:spPr>
           <a:xfrm>
-            <a:off x="1975104" y="2331720"/>
-            <a:ext cx="1572768" cy="1444752"/>
+            <a:off x="10442448" y="4736592"/>
+            <a:ext cx="2761488" cy="1609344"/>
           </a:xfrm>
           <a:prstGeom prst="roundRect">
             <a:avLst/>
           </a:prstGeom>
           <a:solidFill>
-            <a:srgbClr val="E6F2FF"/>
-          </a:solidFill>
-          <a:ln w="22860">
+            <a:srgbClr val="EFFAF1"/>
+          </a:solidFill>
+          <a:ln w="20320">
             <a:solidFill>
-              <a:srgbClr val="004080"/>
+              <a:srgbClr val="4C9B4C"/>
             </a:solidFill>
           </a:ln>
         </p:spPr>
@@ -3363,24 +6056,96 @@
       </p:sp>
       <p:sp>
         <p:nvSpPr>
-          <p:cNvPr id="9" name="Rounded Rectangle 8"/>
+          <p:cNvPr id="73" name="TextBox 72"/>
+          <p:cNvSpPr txBox="1"/>
+          <p:nvPr/>
+        </p:nvSpPr>
+        <p:spPr>
+          <a:xfrm>
+            <a:off x="10753344" y="4882896"/>
+            <a:ext cx="2139696" cy="384048"/>
+          </a:xfrm>
+          <a:prstGeom prst="rect">
+            <a:avLst/>
+          </a:prstGeom>
+          <a:noFill/>
+        </p:spPr>
+        <p:txBody>
+          <a:bodyPr wrap="square" anchor="ctr">
+            <a:spAutoFit/>
+          </a:bodyPr>
+          <a:lstStyle/>
+          <a:p>
+            <a:pPr algn="ctr"/>
+            <a:r>
+              <a:rPr sz="1400" b="1">
+                <a:solidFill>
+                  <a:srgbClr val="1F2937"/>
+                </a:solidFill>
+                <a:latin typeface="Arial"/>
+              </a:rPr>
+              <a:t>Prediction + XAI
+fusion block</a:t>
+            </a:r>
+          </a:p>
+        </p:txBody>
+      </p:sp>
+      <p:sp>
+        <p:nvSpPr>
+          <p:cNvPr id="74" name="TextBox 73"/>
+          <p:cNvSpPr txBox="1"/>
+          <p:nvPr/>
+        </p:nvSpPr>
+        <p:spPr>
+          <a:xfrm>
+            <a:off x="10808208" y="5266944"/>
+            <a:ext cx="2048256" cy="310896"/>
+          </a:xfrm>
+          <a:prstGeom prst="rect">
+            <a:avLst/>
+          </a:prstGeom>
+          <a:noFill/>
+        </p:spPr>
+        <p:txBody>
+          <a:bodyPr wrap="square" anchor="ctr">
+            <a:spAutoFit/>
+          </a:bodyPr>
+          <a:lstStyle/>
+          <a:p>
+            <a:pPr algn="ctr"/>
+            <a:r>
+              <a:rPr sz="1019" b="1">
+                <a:solidFill>
+                  <a:srgbClr val="2A5E2A"/>
+                </a:solidFill>
+                <a:latin typeface="Arial"/>
+              </a:rPr>
+              <a:t>[ Probabilities ; Thresholds ;
+Important Tokens ]</a:t>
+            </a:r>
+          </a:p>
+        </p:txBody>
+      </p:sp>
+      <p:sp>
+        <p:nvSpPr>
+          <p:cNvPr id="75" name="Rectangle 74"/>
           <p:cNvSpPr/>
           <p:nvPr/>
         </p:nvSpPr>
         <p:spPr>
           <a:xfrm>
-            <a:off x="2431206" y="2130552"/>
-            <a:ext cx="660562" cy="201168"/>
-          </a:xfrm>
-          <a:prstGeom prst="roundRect">
-            <a:avLst/>
-          </a:prstGeom>
-          <a:solidFill>
-            <a:srgbClr val="FFEB3B"/>
+            <a:off x="10881360" y="5669280"/>
+            <a:ext cx="182880" cy="164592"/>
+          </a:xfrm>
+          <a:prstGeom prst="rect">
+            <a:avLst/>
+          </a:prstGeom>
+          <a:solidFill>
+            <a:srgbClr val="C8F1C5"/>
           </a:solidFill>
           <a:ln w="12700">
             <a:solidFill>
-              <a:srgbClr val="004080"/>
+              <a:srgbClr val="68AA68"/>
             </a:solidFill>
           </a:ln>
         </p:spPr>
@@ -3403,28 +6168,529 @@
           <a:lstStyle/>
           <a:p>
             <a:pPr algn="ctr"/>
-            <a:r>
-              <a:rPr b="1" sz="1000">
+          </a:p>
+        </p:txBody>
+      </p:sp>
+      <p:sp>
+        <p:nvSpPr>
+          <p:cNvPr id="76" name="Rectangle 75"/>
+          <p:cNvSpPr/>
+          <p:nvPr/>
+        </p:nvSpPr>
+        <p:spPr>
+          <a:xfrm>
+            <a:off x="11192256" y="5669280"/>
+            <a:ext cx="182880" cy="164592"/>
+          </a:xfrm>
+          <a:prstGeom prst="rect">
+            <a:avLst/>
+          </a:prstGeom>
+          <a:solidFill>
+            <a:srgbClr val="C8F1C5"/>
+          </a:solidFill>
+          <a:ln w="12700">
+            <a:solidFill>
+              <a:srgbClr val="68AA68"/>
+            </a:solidFill>
+          </a:ln>
+        </p:spPr>
+        <p:style>
+          <a:lnRef idx="1">
+            <a:schemeClr val="accent1"/>
+          </a:lnRef>
+          <a:fillRef idx="3">
+            <a:schemeClr val="accent1"/>
+          </a:fillRef>
+          <a:effectRef idx="2">
+            <a:schemeClr val="accent1"/>
+          </a:effectRef>
+          <a:fontRef idx="minor">
+            <a:schemeClr val="lt1"/>
+          </a:fontRef>
+        </p:style>
+        <p:txBody>
+          <a:bodyPr rtlCol="0" anchor="ctr"/>
+          <a:lstStyle/>
+          <a:p>
+            <a:pPr algn="ctr"/>
+          </a:p>
+        </p:txBody>
+      </p:sp>
+      <p:sp>
+        <p:nvSpPr>
+          <p:cNvPr id="77" name="Rectangle 76"/>
+          <p:cNvSpPr/>
+          <p:nvPr/>
+        </p:nvSpPr>
+        <p:spPr>
+          <a:xfrm>
+            <a:off x="11503152" y="5669280"/>
+            <a:ext cx="182880" cy="164592"/>
+          </a:xfrm>
+          <a:prstGeom prst="rect">
+            <a:avLst/>
+          </a:prstGeom>
+          <a:solidFill>
+            <a:srgbClr val="C8F1C5"/>
+          </a:solidFill>
+          <a:ln w="12700">
+            <a:solidFill>
+              <a:srgbClr val="68AA68"/>
+            </a:solidFill>
+          </a:ln>
+        </p:spPr>
+        <p:style>
+          <a:lnRef idx="1">
+            <a:schemeClr val="accent1"/>
+          </a:lnRef>
+          <a:fillRef idx="3">
+            <a:schemeClr val="accent1"/>
+          </a:fillRef>
+          <a:effectRef idx="2">
+            <a:schemeClr val="accent1"/>
+          </a:effectRef>
+          <a:fontRef idx="minor">
+            <a:schemeClr val="lt1"/>
+          </a:fontRef>
+        </p:style>
+        <p:txBody>
+          <a:bodyPr rtlCol="0" anchor="ctr"/>
+          <a:lstStyle/>
+          <a:p>
+            <a:pPr algn="ctr"/>
+          </a:p>
+        </p:txBody>
+      </p:sp>
+      <p:sp>
+        <p:nvSpPr>
+          <p:cNvPr id="78" name="Rectangle 77"/>
+          <p:cNvSpPr/>
+          <p:nvPr/>
+        </p:nvSpPr>
+        <p:spPr>
+          <a:xfrm>
+            <a:off x="11814048" y="5669280"/>
+            <a:ext cx="182880" cy="164592"/>
+          </a:xfrm>
+          <a:prstGeom prst="rect">
+            <a:avLst/>
+          </a:prstGeom>
+          <a:solidFill>
+            <a:srgbClr val="C8F1C5"/>
+          </a:solidFill>
+          <a:ln w="12700">
+            <a:solidFill>
+              <a:srgbClr val="68AA68"/>
+            </a:solidFill>
+          </a:ln>
+        </p:spPr>
+        <p:style>
+          <a:lnRef idx="1">
+            <a:schemeClr val="accent1"/>
+          </a:lnRef>
+          <a:fillRef idx="3">
+            <a:schemeClr val="accent1"/>
+          </a:fillRef>
+          <a:effectRef idx="2">
+            <a:schemeClr val="accent1"/>
+          </a:effectRef>
+          <a:fontRef idx="minor">
+            <a:schemeClr val="lt1"/>
+          </a:fontRef>
+        </p:style>
+        <p:txBody>
+          <a:bodyPr rtlCol="0" anchor="ctr"/>
+          <a:lstStyle/>
+          <a:p>
+            <a:pPr algn="ctr"/>
+          </a:p>
+        </p:txBody>
+      </p:sp>
+      <p:sp>
+        <p:nvSpPr>
+          <p:cNvPr id="79" name="Rectangle 78"/>
+          <p:cNvSpPr/>
+          <p:nvPr/>
+        </p:nvSpPr>
+        <p:spPr>
+          <a:xfrm>
+            <a:off x="12124944" y="5669280"/>
+            <a:ext cx="182880" cy="164592"/>
+          </a:xfrm>
+          <a:prstGeom prst="rect">
+            <a:avLst/>
+          </a:prstGeom>
+          <a:solidFill>
+            <a:srgbClr val="C8F1C5"/>
+          </a:solidFill>
+          <a:ln w="12700">
+            <a:solidFill>
+              <a:srgbClr val="68AA68"/>
+            </a:solidFill>
+          </a:ln>
+        </p:spPr>
+        <p:style>
+          <a:lnRef idx="1">
+            <a:schemeClr val="accent1"/>
+          </a:lnRef>
+          <a:fillRef idx="3">
+            <a:schemeClr val="accent1"/>
+          </a:fillRef>
+          <a:effectRef idx="2">
+            <a:schemeClr val="accent1"/>
+          </a:effectRef>
+          <a:fontRef idx="minor">
+            <a:schemeClr val="lt1"/>
+          </a:fontRef>
+        </p:style>
+        <p:txBody>
+          <a:bodyPr rtlCol="0" anchor="ctr"/>
+          <a:lstStyle/>
+          <a:p>
+            <a:pPr algn="ctr"/>
+          </a:p>
+        </p:txBody>
+      </p:sp>
+      <p:sp>
+        <p:nvSpPr>
+          <p:cNvPr id="80" name="Rectangle 79"/>
+          <p:cNvSpPr/>
+          <p:nvPr/>
+        </p:nvSpPr>
+        <p:spPr>
+          <a:xfrm>
+            <a:off x="11027664" y="5925312"/>
+            <a:ext cx="201168" cy="164592"/>
+          </a:xfrm>
+          <a:prstGeom prst="rect">
+            <a:avLst/>
+          </a:prstGeom>
+          <a:solidFill>
+            <a:srgbClr val="DCC7FF"/>
+          </a:solidFill>
+          <a:ln w="12700">
+            <a:solidFill>
+              <a:srgbClr val="896BC8"/>
+            </a:solidFill>
+          </a:ln>
+        </p:spPr>
+        <p:style>
+          <a:lnRef idx="1">
+            <a:schemeClr val="accent1"/>
+          </a:lnRef>
+          <a:fillRef idx="3">
+            <a:schemeClr val="accent1"/>
+          </a:fillRef>
+          <a:effectRef idx="2">
+            <a:schemeClr val="accent1"/>
+          </a:effectRef>
+          <a:fontRef idx="minor">
+            <a:schemeClr val="lt1"/>
+          </a:fontRef>
+        </p:style>
+        <p:txBody>
+          <a:bodyPr rtlCol="0" anchor="ctr"/>
+          <a:lstStyle/>
+          <a:p>
+            <a:pPr algn="ctr"/>
+          </a:p>
+        </p:txBody>
+      </p:sp>
+      <p:sp>
+        <p:nvSpPr>
+          <p:cNvPr id="81" name="Rectangle 80"/>
+          <p:cNvSpPr/>
+          <p:nvPr/>
+        </p:nvSpPr>
+        <p:spPr>
+          <a:xfrm>
+            <a:off x="11375136" y="5925312"/>
+            <a:ext cx="201168" cy="164592"/>
+          </a:xfrm>
+          <a:prstGeom prst="rect">
+            <a:avLst/>
+          </a:prstGeom>
+          <a:solidFill>
+            <a:srgbClr val="DCC7FF"/>
+          </a:solidFill>
+          <a:ln w="12700">
+            <a:solidFill>
+              <a:srgbClr val="896BC8"/>
+            </a:solidFill>
+          </a:ln>
+        </p:spPr>
+        <p:style>
+          <a:lnRef idx="1">
+            <a:schemeClr val="accent1"/>
+          </a:lnRef>
+          <a:fillRef idx="3">
+            <a:schemeClr val="accent1"/>
+          </a:fillRef>
+          <a:effectRef idx="2">
+            <a:schemeClr val="accent1"/>
+          </a:effectRef>
+          <a:fontRef idx="minor">
+            <a:schemeClr val="lt1"/>
+          </a:fontRef>
+        </p:style>
+        <p:txBody>
+          <a:bodyPr rtlCol="0" anchor="ctr"/>
+          <a:lstStyle/>
+          <a:p>
+            <a:pPr algn="ctr"/>
+          </a:p>
+        </p:txBody>
+      </p:sp>
+      <p:sp>
+        <p:nvSpPr>
+          <p:cNvPr id="82" name="Rectangle 81"/>
+          <p:cNvSpPr/>
+          <p:nvPr/>
+        </p:nvSpPr>
+        <p:spPr>
+          <a:xfrm>
+            <a:off x="11722608" y="5925312"/>
+            <a:ext cx="201168" cy="164592"/>
+          </a:xfrm>
+          <a:prstGeom prst="rect">
+            <a:avLst/>
+          </a:prstGeom>
+          <a:solidFill>
+            <a:srgbClr val="DCC7FF"/>
+          </a:solidFill>
+          <a:ln w="12700">
+            <a:solidFill>
+              <a:srgbClr val="896BC8"/>
+            </a:solidFill>
+          </a:ln>
+        </p:spPr>
+        <p:style>
+          <a:lnRef idx="1">
+            <a:schemeClr val="accent1"/>
+          </a:lnRef>
+          <a:fillRef idx="3">
+            <a:schemeClr val="accent1"/>
+          </a:fillRef>
+          <a:effectRef idx="2">
+            <a:schemeClr val="accent1"/>
+          </a:effectRef>
+          <a:fontRef idx="minor">
+            <a:schemeClr val="lt1"/>
+          </a:fontRef>
+        </p:style>
+        <p:txBody>
+          <a:bodyPr rtlCol="0" anchor="ctr"/>
+          <a:lstStyle/>
+          <a:p>
+            <a:pPr algn="ctr"/>
+          </a:p>
+        </p:txBody>
+      </p:sp>
+      <p:sp>
+        <p:nvSpPr>
+          <p:cNvPr id="83" name="Rectangle 82"/>
+          <p:cNvSpPr/>
+          <p:nvPr/>
+        </p:nvSpPr>
+        <p:spPr>
+          <a:xfrm>
+            <a:off x="12070080" y="5925312"/>
+            <a:ext cx="201168" cy="164592"/>
+          </a:xfrm>
+          <a:prstGeom prst="rect">
+            <a:avLst/>
+          </a:prstGeom>
+          <a:solidFill>
+            <a:srgbClr val="DCC7FF"/>
+          </a:solidFill>
+          <a:ln w="12700">
+            <a:solidFill>
+              <a:srgbClr val="896BC8"/>
+            </a:solidFill>
+          </a:ln>
+        </p:spPr>
+        <p:style>
+          <a:lnRef idx="1">
+            <a:schemeClr val="accent1"/>
+          </a:lnRef>
+          <a:fillRef idx="3">
+            <a:schemeClr val="accent1"/>
+          </a:fillRef>
+          <a:effectRef idx="2">
+            <a:schemeClr val="accent1"/>
+          </a:effectRef>
+          <a:fontRef idx="minor">
+            <a:schemeClr val="lt1"/>
+          </a:fontRef>
+        </p:style>
+        <p:txBody>
+          <a:bodyPr rtlCol="0" anchor="ctr"/>
+          <a:lstStyle/>
+          <a:p>
+            <a:pPr algn="ctr"/>
+          </a:p>
+        </p:txBody>
+      </p:sp>
+      <p:sp>
+        <p:nvSpPr>
+          <p:cNvPr id="84" name="TextBox 83"/>
+          <p:cNvSpPr txBox="1"/>
+          <p:nvPr/>
+        </p:nvSpPr>
+        <p:spPr>
+          <a:xfrm>
+            <a:off x="12682728" y="5669280"/>
+            <a:ext cx="310896" cy="201168"/>
+          </a:xfrm>
+          <a:prstGeom prst="rect">
+            <a:avLst/>
+          </a:prstGeom>
+          <a:noFill/>
+        </p:spPr>
+        <p:txBody>
+          <a:bodyPr wrap="square" anchor="ctr">
+            <a:spAutoFit/>
+          </a:bodyPr>
+          <a:lstStyle/>
+          <a:p>
+            <a:pPr algn="ctr"/>
+            <a:r>
+              <a:rPr sz="1800" b="1">
+                <a:solidFill>
+                  <a:srgbClr val="1F2937"/>
+                </a:solidFill>
+                <a:latin typeface="Arial"/>
+              </a:rPr>
+              <a:t>...</a:t>
+            </a:r>
+          </a:p>
+        </p:txBody>
+      </p:sp>
+      <p:sp>
+        <p:nvSpPr>
+          <p:cNvPr id="85" name="TextBox 84"/>
+          <p:cNvSpPr txBox="1"/>
+          <p:nvPr/>
+        </p:nvSpPr>
+        <p:spPr>
+          <a:xfrm>
+            <a:off x="12682728" y="5925312"/>
+            <a:ext cx="310896" cy="201168"/>
+          </a:xfrm>
+          <a:prstGeom prst="rect">
+            <a:avLst/>
+          </a:prstGeom>
+          <a:noFill/>
+        </p:spPr>
+        <p:txBody>
+          <a:bodyPr wrap="square" anchor="ctr">
+            <a:spAutoFit/>
+          </a:bodyPr>
+          <a:lstStyle/>
+          <a:p>
+            <a:pPr algn="ctr"/>
+            <a:r>
+              <a:rPr sz="1800" b="1">
+                <a:solidFill>
+                  <a:srgbClr val="1F2937"/>
+                </a:solidFill>
+                <a:latin typeface="Arial"/>
+              </a:rPr>
+              <a:t>...</a:t>
+            </a:r>
+          </a:p>
+        </p:txBody>
+      </p:sp>
+      <p:sp>
+        <p:nvSpPr>
+          <p:cNvPr id="86" name="TextBox 85"/>
+          <p:cNvSpPr txBox="1"/>
+          <p:nvPr/>
+        </p:nvSpPr>
+        <p:spPr>
+          <a:xfrm>
+            <a:off x="10287000" y="6912864"/>
+            <a:ext cx="3035808" cy="201168"/>
+          </a:xfrm>
+          <a:prstGeom prst="rect">
+            <a:avLst/>
+          </a:prstGeom>
+          <a:noFill/>
+        </p:spPr>
+        <p:txBody>
+          <a:bodyPr wrap="square" anchor="ctr">
+            <a:spAutoFit/>
+          </a:bodyPr>
+          <a:lstStyle/>
+          <a:p>
+            <a:pPr algn="ctr"/>
+            <a:r>
+              <a:rPr sz="1000" b="0">
                 <a:solidFill>
                   <a:srgbClr val="004080"/>
                 </a:solidFill>
                 <a:latin typeface="Arial"/>
               </a:rPr>
-              <a:t>Key Innovation</a:t>
-            </a:r>
-          </a:p>
-        </p:txBody>
-      </p:sp>
-      <p:sp>
-        <p:nvSpPr>
-          <p:cNvPr id="10" name="TextBox 9"/>
+              <a:t>Sequence of input text tokens</a:t>
+            </a:r>
+          </a:p>
+        </p:txBody>
+      </p:sp>
+      <p:sp>
+        <p:nvSpPr>
+          <p:cNvPr id="87" name="Rounded Rectangle 86"/>
+          <p:cNvSpPr/>
+          <p:nvPr/>
+        </p:nvSpPr>
+        <p:spPr>
+          <a:xfrm>
+            <a:off x="10387584" y="6537960"/>
+            <a:ext cx="2816352" cy="493776"/>
+          </a:xfrm>
+          <a:prstGeom prst="roundRect">
+            <a:avLst/>
+          </a:prstGeom>
+          <a:solidFill>
+            <a:srgbClr val="F6F4EC"/>
+          </a:solidFill>
+          <a:ln w="13970">
+            <a:solidFill>
+              <a:srgbClr val="9C8E68"/>
+            </a:solidFill>
+          </a:ln>
+        </p:spPr>
+        <p:style>
+          <a:lnRef idx="1">
+            <a:schemeClr val="accent1"/>
+          </a:lnRef>
+          <a:fillRef idx="3">
+            <a:schemeClr val="accent1"/>
+          </a:fillRef>
+          <a:effectRef idx="2">
+            <a:schemeClr val="accent1"/>
+          </a:effectRef>
+          <a:fontRef idx="minor">
+            <a:schemeClr val="lt1"/>
+          </a:fontRef>
+        </p:style>
+        <p:txBody>
+          <a:bodyPr rtlCol="0" anchor="ctr"/>
+          <a:lstStyle/>
+          <a:p>
+            <a:pPr algn="ctr"/>
+          </a:p>
+        </p:txBody>
+      </p:sp>
+      <p:sp>
+        <p:nvSpPr>
+          <p:cNvPr id="88" name="TextBox 87"/>
           <p:cNvSpPr txBox="1"/>
           <p:nvPr/>
         </p:nvSpPr>
         <p:spPr>
           <a:xfrm>
-            <a:off x="2029968" y="2404872"/>
-            <a:ext cx="1463040" cy="237744"/>
+            <a:off x="10533888" y="6611112"/>
+            <a:ext cx="2523744" cy="310896"/>
           </a:xfrm>
           <a:prstGeom prst="rect">
             <a:avLst/>
@@ -3437,29 +6703,781 @@
           </a:bodyPr>
           <a:lstStyle/>
           <a:p>
-            <a:pPr algn="ctr"/>
-            <a:r>
-              <a:rPr sz="1100" b="1">
+            <a:pPr algn="l"/>
+            <a:r>
+              <a:rPr sz="940" b="1">
+                <a:solidFill>
+                  <a:srgbClr val="554C33"/>
+                </a:solidFill>
+                <a:latin typeface="Arial"/>
+              </a:rPr>
+              <a:t>sample reddit text ...
+"I feel worried but hopeful
+about the final exam"</a:t>
+            </a:r>
+          </a:p>
+        </p:txBody>
+      </p:sp>
+      <p:sp>
+        <p:nvSpPr>
+          <p:cNvPr id="89" name="Rounded Rectangle 88"/>
+          <p:cNvSpPr/>
+          <p:nvPr/>
+        </p:nvSpPr>
+        <p:spPr>
+          <a:xfrm>
+            <a:off x="11137392" y="2852928"/>
+            <a:ext cx="1417320" cy="1755648"/>
+          </a:xfrm>
+          <a:prstGeom prst="roundRect">
+            <a:avLst/>
+          </a:prstGeom>
+          <a:solidFill>
+            <a:srgbClr val="FFF8D8"/>
+          </a:solidFill>
+          <a:ln w="15240">
+            <a:solidFill>
+              <a:srgbClr val="708B2A"/>
+            </a:solidFill>
+          </a:ln>
+        </p:spPr>
+        <p:style>
+          <a:lnRef idx="1">
+            <a:schemeClr val="accent1"/>
+          </a:lnRef>
+          <a:fillRef idx="3">
+            <a:schemeClr val="accent1"/>
+          </a:fillRef>
+          <a:effectRef idx="2">
+            <a:schemeClr val="accent1"/>
+          </a:effectRef>
+          <a:fontRef idx="minor">
+            <a:schemeClr val="lt1"/>
+          </a:fontRef>
+        </p:style>
+        <p:txBody>
+          <a:bodyPr rtlCol="0" anchor="ctr"/>
+          <a:lstStyle/>
+          <a:p>
+            <a:pPr algn="ctr"/>
+          </a:p>
+        </p:txBody>
+      </p:sp>
+      <p:sp>
+        <p:nvSpPr>
+          <p:cNvPr id="90" name="Rectangle 89"/>
+          <p:cNvSpPr/>
+          <p:nvPr/>
+        </p:nvSpPr>
+        <p:spPr>
+          <a:xfrm>
+            <a:off x="11137392" y="2852928"/>
+            <a:ext cx="1417320" cy="237744"/>
+          </a:xfrm>
+          <a:prstGeom prst="rect">
+            <a:avLst/>
+          </a:prstGeom>
+          <a:solidFill>
+            <a:srgbClr val="7D9430"/>
+          </a:solidFill>
+          <a:ln w="12700">
+            <a:solidFill>
+              <a:srgbClr val="708B2A"/>
+            </a:solidFill>
+          </a:ln>
+        </p:spPr>
+        <p:style>
+          <a:lnRef idx="1">
+            <a:schemeClr val="accent1"/>
+          </a:lnRef>
+          <a:fillRef idx="3">
+            <a:schemeClr val="accent1"/>
+          </a:fillRef>
+          <a:effectRef idx="2">
+            <a:schemeClr val="accent1"/>
+          </a:effectRef>
+          <a:fontRef idx="minor">
+            <a:schemeClr val="lt1"/>
+          </a:fontRef>
+        </p:style>
+        <p:txBody>
+          <a:bodyPr rtlCol="0" anchor="ctr"/>
+          <a:lstStyle/>
+          <a:p>
+            <a:pPr algn="ctr"/>
+          </a:p>
+        </p:txBody>
+      </p:sp>
+      <p:sp>
+        <p:nvSpPr>
+          <p:cNvPr id="91" name="TextBox 90"/>
+          <p:cNvSpPr txBox="1"/>
+          <p:nvPr/>
+        </p:nvSpPr>
+        <p:spPr>
+          <a:xfrm>
+            <a:off x="11210544" y="2871216"/>
+            <a:ext cx="1261872" cy="182880"/>
+          </a:xfrm>
+          <a:prstGeom prst="rect">
+            <a:avLst/>
+          </a:prstGeom>
+          <a:noFill/>
+        </p:spPr>
+        <p:txBody>
+          <a:bodyPr wrap="square" anchor="ctr">
+            <a:spAutoFit/>
+          </a:bodyPr>
+          <a:lstStyle/>
+          <a:p>
+            <a:pPr algn="ctr"/>
+            <a:r>
+              <a:rPr sz="900" b="1">
+                <a:solidFill>
+                  <a:srgbClr val="FFFFFF"/>
+                </a:solidFill>
+                <a:latin typeface="Arial"/>
+              </a:rPr>
+              <a:t>Evaluation + IG stack</a:t>
+            </a:r>
+          </a:p>
+        </p:txBody>
+      </p:sp>
+      <p:sp>
+        <p:nvSpPr>
+          <p:cNvPr id="92" name="Rounded Rectangle 91"/>
+          <p:cNvSpPr/>
+          <p:nvPr/>
+        </p:nvSpPr>
+        <p:spPr>
+          <a:xfrm>
+            <a:off x="11338560" y="3182112"/>
+            <a:ext cx="1005840" cy="310896"/>
+          </a:xfrm>
+          <a:prstGeom prst="roundRect">
+            <a:avLst/>
+          </a:prstGeom>
+          <a:solidFill>
+            <a:srgbClr val="F6FAE8"/>
+          </a:solidFill>
+          <a:ln w="12700">
+            <a:solidFill>
+              <a:srgbClr val="A5B86C"/>
+            </a:solidFill>
+          </a:ln>
+        </p:spPr>
+        <p:style>
+          <a:lnRef idx="1">
+            <a:schemeClr val="accent1"/>
+          </a:lnRef>
+          <a:fillRef idx="3">
+            <a:schemeClr val="accent1"/>
+          </a:fillRef>
+          <a:effectRef idx="2">
+            <a:schemeClr val="accent1"/>
+          </a:effectRef>
+          <a:fontRef idx="minor">
+            <a:schemeClr val="lt1"/>
+          </a:fontRef>
+        </p:style>
+        <p:txBody>
+          <a:bodyPr rtlCol="0" anchor="ctr"/>
+          <a:lstStyle/>
+          <a:p>
+            <a:pPr algn="ctr"/>
+          </a:p>
+        </p:txBody>
+      </p:sp>
+      <p:sp>
+        <p:nvSpPr>
+          <p:cNvPr id="93" name="TextBox 92"/>
+          <p:cNvSpPr txBox="1"/>
+          <p:nvPr/>
+        </p:nvSpPr>
+        <p:spPr>
+          <a:xfrm>
+            <a:off x="11393424" y="3218688"/>
+            <a:ext cx="896112" cy="201168"/>
+          </a:xfrm>
+          <a:prstGeom prst="rect">
+            <a:avLst/>
+          </a:prstGeom>
+          <a:noFill/>
+        </p:spPr>
+        <p:txBody>
+          <a:bodyPr wrap="square" anchor="ctr">
+            <a:spAutoFit/>
+          </a:bodyPr>
+          <a:lstStyle/>
+          <a:p>
+            <a:pPr algn="ctr"/>
+            <a:r>
+              <a:rPr sz="850" b="1">
+                <a:solidFill>
+                  <a:srgbClr val="41581F"/>
+                </a:solidFill>
+                <a:latin typeface="Arial"/>
+              </a:rPr>
+              <a:t>Per-label threshold</a:t>
+            </a:r>
+          </a:p>
+        </p:txBody>
+      </p:sp>
+      <p:sp>
+        <p:nvSpPr>
+          <p:cNvPr id="94" name="Rounded Rectangle 93"/>
+          <p:cNvSpPr/>
+          <p:nvPr/>
+        </p:nvSpPr>
+        <p:spPr>
+          <a:xfrm>
+            <a:off x="11338560" y="3584448"/>
+            <a:ext cx="1005840" cy="310896"/>
+          </a:xfrm>
+          <a:prstGeom prst="roundRect">
+            <a:avLst/>
+          </a:prstGeom>
+          <a:solidFill>
+            <a:srgbClr val="F6FAE8"/>
+          </a:solidFill>
+          <a:ln w="12700">
+            <a:solidFill>
+              <a:srgbClr val="A5B86C"/>
+            </a:solidFill>
+          </a:ln>
+        </p:spPr>
+        <p:style>
+          <a:lnRef idx="1">
+            <a:schemeClr val="accent1"/>
+          </a:lnRef>
+          <a:fillRef idx="3">
+            <a:schemeClr val="accent1"/>
+          </a:fillRef>
+          <a:effectRef idx="2">
+            <a:schemeClr val="accent1"/>
+          </a:effectRef>
+          <a:fontRef idx="minor">
+            <a:schemeClr val="lt1"/>
+          </a:fontRef>
+        </p:style>
+        <p:txBody>
+          <a:bodyPr rtlCol="0" anchor="ctr"/>
+          <a:lstStyle/>
+          <a:p>
+            <a:pPr algn="ctr"/>
+          </a:p>
+        </p:txBody>
+      </p:sp>
+      <p:sp>
+        <p:nvSpPr>
+          <p:cNvPr id="95" name="TextBox 94"/>
+          <p:cNvSpPr txBox="1"/>
+          <p:nvPr/>
+        </p:nvSpPr>
+        <p:spPr>
+          <a:xfrm>
+            <a:off x="11393424" y="3621024"/>
+            <a:ext cx="896112" cy="201168"/>
+          </a:xfrm>
+          <a:prstGeom prst="rect">
+            <a:avLst/>
+          </a:prstGeom>
+          <a:noFill/>
+        </p:spPr>
+        <p:txBody>
+          <a:bodyPr wrap="square" anchor="ctr">
+            <a:spAutoFit/>
+          </a:bodyPr>
+          <a:lstStyle/>
+          <a:p>
+            <a:pPr algn="ctr"/>
+            <a:r>
+              <a:rPr sz="850" b="1">
+                <a:solidFill>
+                  <a:srgbClr val="41581F"/>
+                </a:solidFill>
+                <a:latin typeface="Arial"/>
+              </a:rPr>
+              <a:t>IG token heatmap</a:t>
+            </a:r>
+          </a:p>
+        </p:txBody>
+      </p:sp>
+      <p:sp>
+        <p:nvSpPr>
+          <p:cNvPr id="96" name="Rounded Rectangle 95"/>
+          <p:cNvSpPr/>
+          <p:nvPr/>
+        </p:nvSpPr>
+        <p:spPr>
+          <a:xfrm>
+            <a:off x="11338560" y="3986784"/>
+            <a:ext cx="1005840" cy="310896"/>
+          </a:xfrm>
+          <a:prstGeom prst="roundRect">
+            <a:avLst/>
+          </a:prstGeom>
+          <a:solidFill>
+            <a:srgbClr val="F6FAE8"/>
+          </a:solidFill>
+          <a:ln w="12700">
+            <a:solidFill>
+              <a:srgbClr val="A5B86C"/>
+            </a:solidFill>
+          </a:ln>
+        </p:spPr>
+        <p:style>
+          <a:lnRef idx="1">
+            <a:schemeClr val="accent1"/>
+          </a:lnRef>
+          <a:fillRef idx="3">
+            <a:schemeClr val="accent1"/>
+          </a:fillRef>
+          <a:effectRef idx="2">
+            <a:schemeClr val="accent1"/>
+          </a:effectRef>
+          <a:fontRef idx="minor">
+            <a:schemeClr val="lt1"/>
+          </a:fontRef>
+        </p:style>
+        <p:txBody>
+          <a:bodyPr rtlCol="0" anchor="ctr"/>
+          <a:lstStyle/>
+          <a:p>
+            <a:pPr algn="ctr"/>
+          </a:p>
+        </p:txBody>
+      </p:sp>
+      <p:sp>
+        <p:nvSpPr>
+          <p:cNvPr id="97" name="TextBox 96"/>
+          <p:cNvSpPr txBox="1"/>
+          <p:nvPr/>
+        </p:nvSpPr>
+        <p:spPr>
+          <a:xfrm>
+            <a:off x="11393424" y="4023360"/>
+            <a:ext cx="896112" cy="201168"/>
+          </a:xfrm>
+          <a:prstGeom prst="rect">
+            <a:avLst/>
+          </a:prstGeom>
+          <a:noFill/>
+        </p:spPr>
+        <p:txBody>
+          <a:bodyPr wrap="square" anchor="ctr">
+            <a:spAutoFit/>
+          </a:bodyPr>
+          <a:lstStyle/>
+          <a:p>
+            <a:pPr algn="ctr"/>
+            <a:r>
+              <a:rPr sz="850" b="1">
+                <a:solidFill>
+                  <a:srgbClr val="41581F"/>
+                </a:solidFill>
+                <a:latin typeface="Arial"/>
+              </a:rPr>
+              <a:t>Metric summary</a:t>
+            </a:r>
+          </a:p>
+        </p:txBody>
+      </p:sp>
+      <p:sp>
+        <p:nvSpPr>
+          <p:cNvPr id="98" name="Rounded Rectangle 97"/>
+          <p:cNvSpPr/>
+          <p:nvPr/>
+        </p:nvSpPr>
+        <p:spPr>
+          <a:xfrm>
+            <a:off x="11119104" y="1993392"/>
+            <a:ext cx="1444752" cy="512064"/>
+          </a:xfrm>
+          <a:prstGeom prst="roundRect">
+            <a:avLst/>
+          </a:prstGeom>
+          <a:solidFill>
+            <a:srgbClr val="F4F8FF"/>
+          </a:solidFill>
+          <a:ln w="12700">
+            <a:solidFill>
+              <a:srgbClr val="B7C4DE"/>
+            </a:solidFill>
+          </a:ln>
+        </p:spPr>
+        <p:style>
+          <a:lnRef idx="1">
+            <a:schemeClr val="accent1"/>
+          </a:lnRef>
+          <a:fillRef idx="3">
+            <a:schemeClr val="accent1"/>
+          </a:fillRef>
+          <a:effectRef idx="2">
+            <a:schemeClr val="accent1"/>
+          </a:effectRef>
+          <a:fontRef idx="minor">
+            <a:schemeClr val="lt1"/>
+          </a:fontRef>
+        </p:style>
+        <p:txBody>
+          <a:bodyPr rtlCol="0" anchor="ctr"/>
+          <a:lstStyle/>
+          <a:p>
+            <a:pPr algn="ctr"/>
+          </a:p>
+        </p:txBody>
+      </p:sp>
+      <p:sp>
+        <p:nvSpPr>
+          <p:cNvPr id="99" name="Rectangle 98"/>
+          <p:cNvSpPr/>
+          <p:nvPr/>
+        </p:nvSpPr>
+        <p:spPr>
+          <a:xfrm>
+            <a:off x="11228832" y="2157984"/>
+            <a:ext cx="146304" cy="146304"/>
+          </a:xfrm>
+          <a:prstGeom prst="rect">
+            <a:avLst/>
+          </a:prstGeom>
+          <a:solidFill>
+            <a:srgbClr val="E1EAFE"/>
+          </a:solidFill>
+          <a:ln w="11430">
+            <a:solidFill>
+              <a:srgbClr val="7D95C9"/>
+            </a:solidFill>
+          </a:ln>
+        </p:spPr>
+        <p:style>
+          <a:lnRef idx="1">
+            <a:schemeClr val="accent1"/>
+          </a:lnRef>
+          <a:fillRef idx="3">
+            <a:schemeClr val="accent1"/>
+          </a:fillRef>
+          <a:effectRef idx="2">
+            <a:schemeClr val="accent1"/>
+          </a:effectRef>
+          <a:fontRef idx="minor">
+            <a:schemeClr val="lt1"/>
+          </a:fontRef>
+        </p:style>
+        <p:txBody>
+          <a:bodyPr rtlCol="0" anchor="ctr"/>
+          <a:lstStyle/>
+          <a:p>
+            <a:pPr algn="ctr"/>
+          </a:p>
+        </p:txBody>
+      </p:sp>
+      <p:sp>
+        <p:nvSpPr>
+          <p:cNvPr id="100" name="Rectangle 99"/>
+          <p:cNvSpPr/>
+          <p:nvPr/>
+        </p:nvSpPr>
+        <p:spPr>
+          <a:xfrm>
+            <a:off x="11484864" y="2157984"/>
+            <a:ext cx="146304" cy="146304"/>
+          </a:xfrm>
+          <a:prstGeom prst="rect">
+            <a:avLst/>
+          </a:prstGeom>
+          <a:solidFill>
+            <a:srgbClr val="E1EAFE"/>
+          </a:solidFill>
+          <a:ln w="11430">
+            <a:solidFill>
+              <a:srgbClr val="7D95C9"/>
+            </a:solidFill>
+          </a:ln>
+        </p:spPr>
+        <p:style>
+          <a:lnRef idx="1">
+            <a:schemeClr val="accent1"/>
+          </a:lnRef>
+          <a:fillRef idx="3">
+            <a:schemeClr val="accent1"/>
+          </a:fillRef>
+          <a:effectRef idx="2">
+            <a:schemeClr val="accent1"/>
+          </a:effectRef>
+          <a:fontRef idx="minor">
+            <a:schemeClr val="lt1"/>
+          </a:fontRef>
+        </p:style>
+        <p:txBody>
+          <a:bodyPr rtlCol="0" anchor="ctr"/>
+          <a:lstStyle/>
+          <a:p>
+            <a:pPr algn="ctr"/>
+          </a:p>
+        </p:txBody>
+      </p:sp>
+      <p:sp>
+        <p:nvSpPr>
+          <p:cNvPr id="101" name="Rectangle 100"/>
+          <p:cNvSpPr/>
+          <p:nvPr/>
+        </p:nvSpPr>
+        <p:spPr>
+          <a:xfrm>
+            <a:off x="11740896" y="2157984"/>
+            <a:ext cx="146304" cy="146304"/>
+          </a:xfrm>
+          <a:prstGeom prst="rect">
+            <a:avLst/>
+          </a:prstGeom>
+          <a:solidFill>
+            <a:srgbClr val="E1EAFE"/>
+          </a:solidFill>
+          <a:ln w="11430">
+            <a:solidFill>
+              <a:srgbClr val="7D95C9"/>
+            </a:solidFill>
+          </a:ln>
+        </p:spPr>
+        <p:style>
+          <a:lnRef idx="1">
+            <a:schemeClr val="accent1"/>
+          </a:lnRef>
+          <a:fillRef idx="3">
+            <a:schemeClr val="accent1"/>
+          </a:fillRef>
+          <a:effectRef idx="2">
+            <a:schemeClr val="accent1"/>
+          </a:effectRef>
+          <a:fontRef idx="minor">
+            <a:schemeClr val="lt1"/>
+          </a:fontRef>
+        </p:style>
+        <p:txBody>
+          <a:bodyPr rtlCol="0" anchor="ctr"/>
+          <a:lstStyle/>
+          <a:p>
+            <a:pPr algn="ctr"/>
+          </a:p>
+        </p:txBody>
+      </p:sp>
+      <p:sp>
+        <p:nvSpPr>
+          <p:cNvPr id="102" name="Rectangle 101"/>
+          <p:cNvSpPr/>
+          <p:nvPr/>
+        </p:nvSpPr>
+        <p:spPr>
+          <a:xfrm>
+            <a:off x="11996928" y="2157984"/>
+            <a:ext cx="146304" cy="146304"/>
+          </a:xfrm>
+          <a:prstGeom prst="rect">
+            <a:avLst/>
+          </a:prstGeom>
+          <a:solidFill>
+            <a:srgbClr val="E1EAFE"/>
+          </a:solidFill>
+          <a:ln w="11430">
+            <a:solidFill>
+              <a:srgbClr val="7D95C9"/>
+            </a:solidFill>
+          </a:ln>
+        </p:spPr>
+        <p:style>
+          <a:lnRef idx="1">
+            <a:schemeClr val="accent1"/>
+          </a:lnRef>
+          <a:fillRef idx="3">
+            <a:schemeClr val="accent1"/>
+          </a:fillRef>
+          <a:effectRef idx="2">
+            <a:schemeClr val="accent1"/>
+          </a:effectRef>
+          <a:fontRef idx="minor">
+            <a:schemeClr val="lt1"/>
+          </a:fontRef>
+        </p:style>
+        <p:txBody>
+          <a:bodyPr rtlCol="0" anchor="ctr"/>
+          <a:lstStyle/>
+          <a:p>
+            <a:pPr algn="ctr"/>
+          </a:p>
+        </p:txBody>
+      </p:sp>
+      <p:sp>
+        <p:nvSpPr>
+          <p:cNvPr id="103" name="TextBox 102"/>
+          <p:cNvSpPr txBox="1"/>
+          <p:nvPr/>
+        </p:nvSpPr>
+        <p:spPr>
+          <a:xfrm>
+            <a:off x="12289536" y="2084832"/>
+            <a:ext cx="146304" cy="164592"/>
+          </a:xfrm>
+          <a:prstGeom prst="rect">
+            <a:avLst/>
+          </a:prstGeom>
+          <a:noFill/>
+        </p:spPr>
+        <p:txBody>
+          <a:bodyPr wrap="square" anchor="ctr">
+            <a:spAutoFit/>
+          </a:bodyPr>
+          <a:lstStyle/>
+          <a:p>
+            <a:pPr algn="ctr"/>
+            <a:r>
+              <a:rPr sz="1600" b="1">
+                <a:solidFill>
+                  <a:srgbClr val="1F2937"/>
+                </a:solidFill>
+                <a:latin typeface="Arial"/>
+              </a:rPr>
+              <a:t>...</a:t>
+            </a:r>
+          </a:p>
+        </p:txBody>
+      </p:sp>
+      <p:sp>
+        <p:nvSpPr>
+          <p:cNvPr id="104" name="TextBox 103"/>
+          <p:cNvSpPr txBox="1"/>
+          <p:nvPr/>
+        </p:nvSpPr>
+        <p:spPr>
+          <a:xfrm>
+            <a:off x="11228832" y="1773936"/>
+            <a:ext cx="1225296" cy="164592"/>
+          </a:xfrm>
+          <a:prstGeom prst="rect">
+            <a:avLst/>
+          </a:prstGeom>
+          <a:noFill/>
+        </p:spPr>
+        <p:txBody>
+          <a:bodyPr wrap="square" anchor="ctr">
+            <a:spAutoFit/>
+          </a:bodyPr>
+          <a:lstStyle/>
+          <a:p>
+            <a:pPr algn="ctr"/>
+            <a:r>
+              <a:rPr sz="950" b="1">
                 <a:solidFill>
                   <a:srgbClr val="004080"/>
                 </a:solidFill>
                 <a:latin typeface="Arial"/>
               </a:rPr>
-              <a:t>Stage 1</a:t>
-            </a:r>
-          </a:p>
-        </p:txBody>
-      </p:sp>
-      <p:sp>
-        <p:nvSpPr>
-          <p:cNvPr id="11" name="TextBox 10"/>
+              <a:t>Per-class decisions</a:t>
+            </a:r>
+          </a:p>
+        </p:txBody>
+      </p:sp>
+      <p:sp>
+        <p:nvSpPr>
+          <p:cNvPr id="105" name="Rounded Rectangle 104"/>
+          <p:cNvSpPr/>
+          <p:nvPr/>
+        </p:nvSpPr>
+        <p:spPr>
+          <a:xfrm>
+            <a:off x="10314432" y="841248"/>
+            <a:ext cx="2560320" cy="713232"/>
+          </a:xfrm>
+          <a:prstGeom prst="roundRect">
+            <a:avLst/>
+          </a:prstGeom>
+          <a:solidFill>
+            <a:srgbClr val="F8FAFC"/>
+          </a:solidFill>
+          <a:ln w="20320">
+            <a:solidFill>
+              <a:srgbClr val="6E83B7"/>
+            </a:solidFill>
+          </a:ln>
+        </p:spPr>
+        <p:style>
+          <a:lnRef idx="1">
+            <a:schemeClr val="accent1"/>
+          </a:lnRef>
+          <a:fillRef idx="3">
+            <a:schemeClr val="accent1"/>
+          </a:fillRef>
+          <a:effectRef idx="2">
+            <a:schemeClr val="accent1"/>
+          </a:effectRef>
+          <a:fontRef idx="minor">
+            <a:schemeClr val="lt1"/>
+          </a:fontRef>
+        </p:style>
+        <p:txBody>
+          <a:bodyPr rtlCol="0" anchor="ctr"/>
+          <a:lstStyle/>
+          <a:p>
+            <a:pPr algn="ctr"/>
+          </a:p>
+        </p:txBody>
+      </p:sp>
+      <p:sp>
+        <p:nvSpPr>
+          <p:cNvPr id="106" name="Rounded Rectangle 105"/>
+          <p:cNvSpPr/>
+          <p:nvPr/>
+        </p:nvSpPr>
+        <p:spPr>
+          <a:xfrm>
+            <a:off x="10424160" y="978408"/>
+            <a:ext cx="347472" cy="329184"/>
+          </a:xfrm>
+          <a:prstGeom prst="roundRect">
+            <a:avLst/>
+          </a:prstGeom>
+          <a:solidFill>
+            <a:srgbClr val="F4F8FF"/>
+          </a:solidFill>
+          <a:ln w="12700">
+            <a:solidFill>
+              <a:srgbClr val="6E83B7"/>
+            </a:solidFill>
+          </a:ln>
+        </p:spPr>
+        <p:style>
+          <a:lnRef idx="1">
+            <a:schemeClr val="accent1"/>
+          </a:lnRef>
+          <a:fillRef idx="3">
+            <a:schemeClr val="accent1"/>
+          </a:fillRef>
+          <a:effectRef idx="2">
+            <a:schemeClr val="accent1"/>
+          </a:effectRef>
+          <a:fontRef idx="minor">
+            <a:schemeClr val="lt1"/>
+          </a:fontRef>
+        </p:style>
+        <p:txBody>
+          <a:bodyPr rtlCol="0" anchor="ctr"/>
+          <a:lstStyle/>
+          <a:p>
+            <a:pPr algn="ctr"/>
+          </a:p>
+        </p:txBody>
+      </p:sp>
+      <p:sp>
+        <p:nvSpPr>
+          <p:cNvPr id="107" name="TextBox 106"/>
           <p:cNvSpPr txBox="1"/>
           <p:nvPr/>
         </p:nvSpPr>
         <p:spPr>
           <a:xfrm>
-            <a:off x="2048256" y="2660904"/>
-            <a:ext cx="1426464" cy="310896"/>
+            <a:off x="10881360" y="950976"/>
+            <a:ext cx="1847088" cy="365760"/>
           </a:xfrm>
           <a:prstGeom prst="rect">
             <a:avLst/>
@@ -3472,1077 +7490,35 @@
           </a:bodyPr>
           <a:lstStyle/>
           <a:p>
-            <a:pPr algn="ctr"/>
-            <a:r>
-              <a:rPr sz="1500" b="1">
+            <a:pPr algn="l"/>
+            <a:r>
+              <a:rPr sz="1200" b="1">
                 <a:solidFill>
                   <a:srgbClr val="1F2937"/>
                 </a:solidFill>
                 <a:latin typeface="Arial"/>
               </a:rPr>
-              <a:t>Data Pipeline</a:t>
-            </a:r>
-          </a:p>
-        </p:txBody>
-      </p:sp>
-      <p:sp>
-        <p:nvSpPr>
-          <p:cNvPr id="12" name="TextBox 11"/>
-          <p:cNvSpPr txBox="1"/>
-          <p:nvPr/>
-        </p:nvSpPr>
-        <p:spPr>
-          <a:xfrm>
-            <a:off x="2066544" y="3090672"/>
-            <a:ext cx="1389888" cy="420624"/>
-          </a:xfrm>
-          <a:prstGeom prst="rect">
-            <a:avLst/>
-          </a:prstGeom>
-          <a:noFill/>
-        </p:spPr>
-        <p:txBody>
-          <a:bodyPr wrap="square" anchor="ctr">
-            <a:spAutoFit/>
-          </a:bodyPr>
-          <a:lstStyle/>
-          <a:p>
-            <a:pPr algn="ctr"/>
-            <a:r>
-              <a:rPr sz="1050" b="0">
-                <a:solidFill>
-                  <a:srgbClr val="1F2937"/>
-                </a:solidFill>
-                <a:latin typeface="Arial"/>
-              </a:rPr>
-              <a:t>Load, map, clean, split</a:t>
-            </a:r>
-          </a:p>
-        </p:txBody>
-      </p:sp>
-      <p:sp>
-        <p:nvSpPr>
-          <p:cNvPr id="13" name="Rounded Rectangle 12"/>
-          <p:cNvSpPr/>
-          <p:nvPr/>
-        </p:nvSpPr>
-        <p:spPr>
-          <a:xfrm>
-            <a:off x="3694176" y="2331720"/>
-            <a:ext cx="1572768" cy="1444752"/>
-          </a:xfrm>
-          <a:prstGeom prst="roundRect">
-            <a:avLst/>
-          </a:prstGeom>
-          <a:solidFill>
-            <a:srgbClr val="E6F2FF"/>
-          </a:solidFill>
-          <a:ln w="22860">
-            <a:solidFill>
-              <a:srgbClr val="004080"/>
-            </a:solidFill>
-          </a:ln>
-        </p:spPr>
-        <p:style>
-          <a:lnRef idx="1">
-            <a:schemeClr val="accent1"/>
-          </a:lnRef>
-          <a:fillRef idx="3">
-            <a:schemeClr val="accent1"/>
-          </a:fillRef>
-          <a:effectRef idx="2">
-            <a:schemeClr val="accent1"/>
-          </a:effectRef>
-          <a:fontRef idx="minor">
-            <a:schemeClr val="lt1"/>
-          </a:fontRef>
-        </p:style>
-        <p:txBody>
-          <a:bodyPr rtlCol="0" anchor="ctr"/>
-          <a:lstStyle/>
-          <a:p>
-            <a:pPr algn="ctr"/>
-          </a:p>
-        </p:txBody>
-      </p:sp>
-      <p:sp>
-        <p:nvSpPr>
-          <p:cNvPr id="14" name="TextBox 13"/>
-          <p:cNvSpPr txBox="1"/>
-          <p:nvPr/>
-        </p:nvSpPr>
-        <p:spPr>
-          <a:xfrm>
-            <a:off x="3749040" y="2404872"/>
-            <a:ext cx="1463040" cy="237744"/>
-          </a:xfrm>
-          <a:prstGeom prst="rect">
-            <a:avLst/>
-          </a:prstGeom>
-          <a:noFill/>
-        </p:spPr>
-        <p:txBody>
-          <a:bodyPr wrap="square" anchor="ctr">
-            <a:spAutoFit/>
-          </a:bodyPr>
-          <a:lstStyle/>
-          <a:p>
-            <a:pPr algn="ctr"/>
-            <a:r>
-              <a:rPr sz="1100" b="1">
-                <a:solidFill>
-                  <a:srgbClr val="004080"/>
-                </a:solidFill>
-                <a:latin typeface="Arial"/>
-              </a:rPr>
-              <a:t>Stage 2</a:t>
-            </a:r>
-          </a:p>
-        </p:txBody>
-      </p:sp>
-      <p:sp>
-        <p:nvSpPr>
-          <p:cNvPr id="15" name="TextBox 14"/>
-          <p:cNvSpPr txBox="1"/>
-          <p:nvPr/>
-        </p:nvSpPr>
-        <p:spPr>
-          <a:xfrm>
-            <a:off x="3767328" y="2660904"/>
-            <a:ext cx="1426464" cy="310896"/>
-          </a:xfrm>
-          <a:prstGeom prst="rect">
-            <a:avLst/>
-          </a:prstGeom>
-          <a:noFill/>
-        </p:spPr>
-        <p:txBody>
-          <a:bodyPr wrap="square" anchor="ctr">
-            <a:spAutoFit/>
-          </a:bodyPr>
-          <a:lstStyle/>
-          <a:p>
-            <a:pPr algn="ctr"/>
-            <a:r>
-              <a:rPr sz="1500" b="1">
-                <a:solidFill>
-                  <a:srgbClr val="1F2937"/>
-                </a:solidFill>
-                <a:latin typeface="Arial"/>
-              </a:rPr>
-              <a:t>EDA</a:t>
-            </a:r>
-          </a:p>
-        </p:txBody>
-      </p:sp>
-      <p:sp>
-        <p:nvSpPr>
-          <p:cNvPr id="16" name="TextBox 15"/>
-          <p:cNvSpPr txBox="1"/>
-          <p:nvPr/>
-        </p:nvSpPr>
-        <p:spPr>
-          <a:xfrm>
-            <a:off x="3785616" y="3090672"/>
-            <a:ext cx="1389888" cy="420624"/>
-          </a:xfrm>
-          <a:prstGeom prst="rect">
-            <a:avLst/>
-          </a:prstGeom>
-          <a:noFill/>
-        </p:spPr>
-        <p:txBody>
-          <a:bodyPr wrap="square" anchor="ctr">
-            <a:spAutoFit/>
-          </a:bodyPr>
-          <a:lstStyle/>
-          <a:p>
-            <a:pPr algn="ctr"/>
-            <a:r>
-              <a:rPr sz="1050" b="0">
-                <a:solidFill>
-                  <a:srgbClr val="1F2937"/>
-                </a:solidFill>
-                <a:latin typeface="Arial"/>
-              </a:rPr>
-              <a:t>Distribution checks</a:t>
-            </a:r>
-          </a:p>
-        </p:txBody>
-      </p:sp>
-      <p:sp>
-        <p:nvSpPr>
-          <p:cNvPr id="17" name="Rounded Rectangle 16"/>
-          <p:cNvSpPr/>
-          <p:nvPr/>
-        </p:nvSpPr>
-        <p:spPr>
-          <a:xfrm>
-            <a:off x="5413248" y="2331720"/>
-            <a:ext cx="1572768" cy="1444752"/>
-          </a:xfrm>
-          <a:prstGeom prst="roundRect">
-            <a:avLst/>
-          </a:prstGeom>
-          <a:solidFill>
-            <a:srgbClr val="E6F2FF"/>
-          </a:solidFill>
-          <a:ln w="22860">
-            <a:solidFill>
-              <a:srgbClr val="004080"/>
-            </a:solidFill>
-          </a:ln>
-        </p:spPr>
-        <p:style>
-          <a:lnRef idx="1">
-            <a:schemeClr val="accent1"/>
-          </a:lnRef>
-          <a:fillRef idx="3">
-            <a:schemeClr val="accent1"/>
-          </a:fillRef>
-          <a:effectRef idx="2">
-            <a:schemeClr val="accent1"/>
-          </a:effectRef>
-          <a:fontRef idx="minor">
-            <a:schemeClr val="lt1"/>
-          </a:fontRef>
-        </p:style>
-        <p:txBody>
-          <a:bodyPr rtlCol="0" anchor="ctr"/>
-          <a:lstStyle/>
-          <a:p>
-            <a:pPr algn="ctr"/>
-          </a:p>
-        </p:txBody>
-      </p:sp>
-      <p:sp>
-        <p:nvSpPr>
-          <p:cNvPr id="18" name="TextBox 17"/>
-          <p:cNvSpPr txBox="1"/>
-          <p:nvPr/>
-        </p:nvSpPr>
-        <p:spPr>
-          <a:xfrm>
-            <a:off x="5468112" y="2404872"/>
-            <a:ext cx="1463040" cy="237744"/>
-          </a:xfrm>
-          <a:prstGeom prst="rect">
-            <a:avLst/>
-          </a:prstGeom>
-          <a:noFill/>
-        </p:spPr>
-        <p:txBody>
-          <a:bodyPr wrap="square" anchor="ctr">
-            <a:spAutoFit/>
-          </a:bodyPr>
-          <a:lstStyle/>
-          <a:p>
-            <a:pPr algn="ctr"/>
-            <a:r>
-              <a:rPr sz="1100" b="1">
-                <a:solidFill>
-                  <a:srgbClr val="004080"/>
-                </a:solidFill>
-                <a:latin typeface="Arial"/>
-              </a:rPr>
-              <a:t>Stage 3</a:t>
-            </a:r>
-          </a:p>
-        </p:txBody>
-      </p:sp>
-      <p:sp>
-        <p:nvSpPr>
-          <p:cNvPr id="19" name="TextBox 18"/>
-          <p:cNvSpPr txBox="1"/>
-          <p:nvPr/>
-        </p:nvSpPr>
-        <p:spPr>
-          <a:xfrm>
-            <a:off x="5486400" y="2660904"/>
-            <a:ext cx="1426464" cy="310896"/>
-          </a:xfrm>
-          <a:prstGeom prst="rect">
-            <a:avLst/>
-          </a:prstGeom>
-          <a:noFill/>
-        </p:spPr>
-        <p:txBody>
-          <a:bodyPr wrap="square" anchor="ctr">
-            <a:spAutoFit/>
-          </a:bodyPr>
-          <a:lstStyle/>
-          <a:p>
-            <a:pPr algn="ctr"/>
-            <a:r>
-              <a:rPr sz="1500" b="1">
-                <a:solidFill>
-                  <a:srgbClr val="1F2937"/>
-                </a:solidFill>
-                <a:latin typeface="Arial"/>
-              </a:rPr>
-              <a:t>Baselines</a:t>
-            </a:r>
-          </a:p>
-        </p:txBody>
-      </p:sp>
-      <p:sp>
-        <p:nvSpPr>
-          <p:cNvPr id="20" name="TextBox 19"/>
-          <p:cNvSpPr txBox="1"/>
-          <p:nvPr/>
-        </p:nvSpPr>
-        <p:spPr>
-          <a:xfrm>
-            <a:off x="5504688" y="3090672"/>
-            <a:ext cx="1389888" cy="420624"/>
-          </a:xfrm>
-          <a:prstGeom prst="rect">
-            <a:avLst/>
-          </a:prstGeom>
-          <a:noFill/>
-        </p:spPr>
-        <p:txBody>
-          <a:bodyPr wrap="square" anchor="ctr">
-            <a:spAutoFit/>
-          </a:bodyPr>
-          <a:lstStyle/>
-          <a:p>
-            <a:pPr algn="ctr"/>
-            <a:r>
-              <a:rPr sz="1050" b="0">
-                <a:solidFill>
-                  <a:srgbClr val="1F2937"/>
-                </a:solidFill>
-                <a:latin typeface="Arial"/>
-              </a:rPr>
-              <a:t>TF-IDF LogReg / SVM</a:t>
-            </a:r>
-          </a:p>
-        </p:txBody>
-      </p:sp>
-      <p:sp>
-        <p:nvSpPr>
-          <p:cNvPr id="21" name="Rounded Rectangle 20"/>
-          <p:cNvSpPr/>
-          <p:nvPr/>
-        </p:nvSpPr>
-        <p:spPr>
-          <a:xfrm>
-            <a:off x="7132320" y="2331720"/>
-            <a:ext cx="1572768" cy="1444752"/>
-          </a:xfrm>
-          <a:prstGeom prst="roundRect">
-            <a:avLst/>
-          </a:prstGeom>
-          <a:solidFill>
-            <a:srgbClr val="E6F2FF"/>
-          </a:solidFill>
-          <a:ln w="22860">
-            <a:solidFill>
-              <a:srgbClr val="004080"/>
-            </a:solidFill>
-          </a:ln>
-        </p:spPr>
-        <p:style>
-          <a:lnRef idx="1">
-            <a:schemeClr val="accent1"/>
-          </a:lnRef>
-          <a:fillRef idx="3">
-            <a:schemeClr val="accent1"/>
-          </a:fillRef>
-          <a:effectRef idx="2">
-            <a:schemeClr val="accent1"/>
-          </a:effectRef>
-          <a:fontRef idx="minor">
-            <a:schemeClr val="lt1"/>
-          </a:fontRef>
-        </p:style>
-        <p:txBody>
-          <a:bodyPr rtlCol="0" anchor="ctr"/>
-          <a:lstStyle/>
-          <a:p>
-            <a:pPr algn="ctr"/>
-          </a:p>
-        </p:txBody>
-      </p:sp>
-      <p:sp>
-        <p:nvSpPr>
-          <p:cNvPr id="22" name="Rounded Rectangle 21"/>
-          <p:cNvSpPr/>
-          <p:nvPr/>
-        </p:nvSpPr>
-        <p:spPr>
-          <a:xfrm>
-            <a:off x="7588422" y="2130552"/>
-            <a:ext cx="660562" cy="201168"/>
-          </a:xfrm>
-          <a:prstGeom prst="roundRect">
-            <a:avLst/>
-          </a:prstGeom>
-          <a:solidFill>
-            <a:srgbClr val="FFEB3B"/>
-          </a:solidFill>
-          <a:ln w="12700">
-            <a:solidFill>
-              <a:srgbClr val="004080"/>
-            </a:solidFill>
-          </a:ln>
-        </p:spPr>
-        <p:style>
-          <a:lnRef idx="1">
-            <a:schemeClr val="accent1"/>
-          </a:lnRef>
-          <a:fillRef idx="3">
-            <a:schemeClr val="accent1"/>
-          </a:fillRef>
-          <a:effectRef idx="2">
-            <a:schemeClr val="accent1"/>
-          </a:effectRef>
-          <a:fontRef idx="minor">
-            <a:schemeClr val="lt1"/>
-          </a:fontRef>
-        </p:style>
-        <p:txBody>
-          <a:bodyPr rtlCol="0" anchor="ctr"/>
-          <a:lstStyle/>
-          <a:p>
-            <a:pPr algn="ctr"/>
-            <a:r>
-              <a:rPr b="1" sz="1000">
-                <a:solidFill>
-                  <a:srgbClr val="004080"/>
-                </a:solidFill>
-                <a:latin typeface="Arial"/>
-              </a:rPr>
-              <a:t>Key Innovation</a:t>
-            </a:r>
-          </a:p>
-        </p:txBody>
-      </p:sp>
-      <p:sp>
-        <p:nvSpPr>
-          <p:cNvPr id="23" name="TextBox 22"/>
-          <p:cNvSpPr txBox="1"/>
-          <p:nvPr/>
-        </p:nvSpPr>
-        <p:spPr>
-          <a:xfrm>
-            <a:off x="7187184" y="2404872"/>
-            <a:ext cx="1463040" cy="237744"/>
-          </a:xfrm>
-          <a:prstGeom prst="rect">
-            <a:avLst/>
-          </a:prstGeom>
-          <a:noFill/>
-        </p:spPr>
-        <p:txBody>
-          <a:bodyPr wrap="square" anchor="ctr">
-            <a:spAutoFit/>
-          </a:bodyPr>
-          <a:lstStyle/>
-          <a:p>
-            <a:pPr algn="ctr"/>
-            <a:r>
-              <a:rPr sz="1100" b="1">
-                <a:solidFill>
-                  <a:srgbClr val="004080"/>
-                </a:solidFill>
-                <a:latin typeface="Arial"/>
-              </a:rPr>
-              <a:t>Stage 4</a:t>
-            </a:r>
-          </a:p>
-        </p:txBody>
-      </p:sp>
-      <p:sp>
-        <p:nvSpPr>
-          <p:cNvPr id="24" name="TextBox 23"/>
-          <p:cNvSpPr txBox="1"/>
-          <p:nvPr/>
-        </p:nvSpPr>
-        <p:spPr>
-          <a:xfrm>
-            <a:off x="7205472" y="2660904"/>
-            <a:ext cx="1426464" cy="310896"/>
-          </a:xfrm>
-          <a:prstGeom prst="rect">
-            <a:avLst/>
-          </a:prstGeom>
-          <a:noFill/>
-        </p:spPr>
-        <p:txBody>
-          <a:bodyPr wrap="square" anchor="ctr">
-            <a:spAutoFit/>
-          </a:bodyPr>
-          <a:lstStyle/>
-          <a:p>
-            <a:pPr algn="ctr"/>
-            <a:r>
-              <a:rPr sz="1500" b="1">
-                <a:solidFill>
-                  <a:srgbClr val="1F2937"/>
-                </a:solidFill>
-                <a:latin typeface="Arial"/>
-              </a:rPr>
-              <a:t>Train</a:t>
-            </a:r>
-          </a:p>
-        </p:txBody>
-      </p:sp>
-      <p:sp>
-        <p:nvSpPr>
-          <p:cNvPr id="25" name="TextBox 24"/>
-          <p:cNvSpPr txBox="1"/>
-          <p:nvPr/>
-        </p:nvSpPr>
-        <p:spPr>
-          <a:xfrm>
-            <a:off x="7223760" y="3090672"/>
-            <a:ext cx="1389888" cy="420624"/>
-          </a:xfrm>
-          <a:prstGeom prst="rect">
-            <a:avLst/>
-          </a:prstGeom>
-          <a:noFill/>
-        </p:spPr>
-        <p:txBody>
-          <a:bodyPr wrap="square" anchor="ctr">
-            <a:spAutoFit/>
-          </a:bodyPr>
-          <a:lstStyle/>
-          <a:p>
-            <a:pPr algn="ctr"/>
-            <a:r>
-              <a:rPr sz="1050" b="0">
-                <a:solidFill>
-                  <a:srgbClr val="1F2937"/>
-                </a:solidFill>
-                <a:latin typeface="Arial"/>
-              </a:rPr>
-              <a:t>Transformer fine-tuning</a:t>
-            </a:r>
-          </a:p>
-        </p:txBody>
-      </p:sp>
-      <p:sp>
-        <p:nvSpPr>
-          <p:cNvPr id="26" name="Rounded Rectangle 25"/>
-          <p:cNvSpPr/>
-          <p:nvPr/>
-        </p:nvSpPr>
-        <p:spPr>
-          <a:xfrm>
-            <a:off x="8851392" y="2331720"/>
-            <a:ext cx="1572768" cy="1444752"/>
-          </a:xfrm>
-          <a:prstGeom prst="roundRect">
-            <a:avLst/>
-          </a:prstGeom>
-          <a:solidFill>
-            <a:srgbClr val="E6F2FF"/>
-          </a:solidFill>
-          <a:ln w="22860">
-            <a:solidFill>
-              <a:srgbClr val="004080"/>
-            </a:solidFill>
-          </a:ln>
-        </p:spPr>
-        <p:style>
-          <a:lnRef idx="1">
-            <a:schemeClr val="accent1"/>
-          </a:lnRef>
-          <a:fillRef idx="3">
-            <a:schemeClr val="accent1"/>
-          </a:fillRef>
-          <a:effectRef idx="2">
-            <a:schemeClr val="accent1"/>
-          </a:effectRef>
-          <a:fontRef idx="minor">
-            <a:schemeClr val="lt1"/>
-          </a:fontRef>
-        </p:style>
-        <p:txBody>
-          <a:bodyPr rtlCol="0" anchor="ctr"/>
-          <a:lstStyle/>
-          <a:p>
-            <a:pPr algn="ctr"/>
-          </a:p>
-        </p:txBody>
-      </p:sp>
-      <p:sp>
-        <p:nvSpPr>
-          <p:cNvPr id="27" name="TextBox 26"/>
-          <p:cNvSpPr txBox="1"/>
-          <p:nvPr/>
-        </p:nvSpPr>
-        <p:spPr>
-          <a:xfrm>
-            <a:off x="8906256" y="2404872"/>
-            <a:ext cx="1463040" cy="237744"/>
-          </a:xfrm>
-          <a:prstGeom prst="rect">
-            <a:avLst/>
-          </a:prstGeom>
-          <a:noFill/>
-        </p:spPr>
-        <p:txBody>
-          <a:bodyPr wrap="square" anchor="ctr">
-            <a:spAutoFit/>
-          </a:bodyPr>
-          <a:lstStyle/>
-          <a:p>
-            <a:pPr algn="ctr"/>
-            <a:r>
-              <a:rPr sz="1100" b="1">
-                <a:solidFill>
-                  <a:srgbClr val="004080"/>
-                </a:solidFill>
-                <a:latin typeface="Arial"/>
-              </a:rPr>
-              <a:t>Stage 5</a:t>
-            </a:r>
-          </a:p>
-        </p:txBody>
-      </p:sp>
-      <p:sp>
-        <p:nvSpPr>
-          <p:cNvPr id="28" name="TextBox 27"/>
-          <p:cNvSpPr txBox="1"/>
-          <p:nvPr/>
-        </p:nvSpPr>
-        <p:spPr>
-          <a:xfrm>
-            <a:off x="8924544" y="2660904"/>
-            <a:ext cx="1426464" cy="310896"/>
-          </a:xfrm>
-          <a:prstGeom prst="rect">
-            <a:avLst/>
-          </a:prstGeom>
-          <a:noFill/>
-        </p:spPr>
-        <p:txBody>
-          <a:bodyPr wrap="square" anchor="ctr">
-            <a:spAutoFit/>
-          </a:bodyPr>
-          <a:lstStyle/>
-          <a:p>
-            <a:pPr algn="ctr"/>
-            <a:r>
-              <a:rPr sz="1500" b="1">
-                <a:solidFill>
-                  <a:srgbClr val="1F2937"/>
-                </a:solidFill>
-                <a:latin typeface="Arial"/>
-              </a:rPr>
-              <a:t>Evaluate</a:t>
-            </a:r>
-          </a:p>
-        </p:txBody>
-      </p:sp>
-      <p:sp>
-        <p:nvSpPr>
-          <p:cNvPr id="29" name="TextBox 28"/>
-          <p:cNvSpPr txBox="1"/>
-          <p:nvPr/>
-        </p:nvSpPr>
-        <p:spPr>
-          <a:xfrm>
-            <a:off x="8942832" y="3090672"/>
-            <a:ext cx="1389888" cy="420624"/>
-          </a:xfrm>
-          <a:prstGeom prst="rect">
-            <a:avLst/>
-          </a:prstGeom>
-          <a:noFill/>
-        </p:spPr>
-        <p:txBody>
-          <a:bodyPr wrap="square" anchor="ctr">
-            <a:spAutoFit/>
-          </a:bodyPr>
-          <a:lstStyle/>
-          <a:p>
-            <a:pPr algn="ctr"/>
-            <a:r>
-              <a:rPr sz="1050" b="0">
-                <a:solidFill>
-                  <a:srgbClr val="1F2937"/>
-                </a:solidFill>
-                <a:latin typeface="Arial"/>
-              </a:rPr>
-              <a:t>Metrics and reports</a:t>
-            </a:r>
-          </a:p>
-        </p:txBody>
-      </p:sp>
-      <p:sp>
-        <p:nvSpPr>
-          <p:cNvPr id="30" name="Rounded Rectangle 29"/>
-          <p:cNvSpPr/>
-          <p:nvPr/>
-        </p:nvSpPr>
-        <p:spPr>
-          <a:xfrm>
-            <a:off x="10570464" y="2331720"/>
-            <a:ext cx="1572768" cy="1444752"/>
-          </a:xfrm>
-          <a:prstGeom prst="roundRect">
-            <a:avLst/>
-          </a:prstGeom>
-          <a:solidFill>
-            <a:srgbClr val="E6F2FF"/>
-          </a:solidFill>
-          <a:ln w="22860">
-            <a:solidFill>
-              <a:srgbClr val="004080"/>
-            </a:solidFill>
-          </a:ln>
-        </p:spPr>
-        <p:style>
-          <a:lnRef idx="1">
-            <a:schemeClr val="accent1"/>
-          </a:lnRef>
-          <a:fillRef idx="3">
-            <a:schemeClr val="accent1"/>
-          </a:fillRef>
-          <a:effectRef idx="2">
-            <a:schemeClr val="accent1"/>
-          </a:effectRef>
-          <a:fontRef idx="minor">
-            <a:schemeClr val="lt1"/>
-          </a:fontRef>
-        </p:style>
-        <p:txBody>
-          <a:bodyPr rtlCol="0" anchor="ctr"/>
-          <a:lstStyle/>
-          <a:p>
-            <a:pPr algn="ctr"/>
-          </a:p>
-        </p:txBody>
-      </p:sp>
-      <p:sp>
-        <p:nvSpPr>
-          <p:cNvPr id="31" name="Rounded Rectangle 30"/>
-          <p:cNvSpPr/>
-          <p:nvPr/>
-        </p:nvSpPr>
-        <p:spPr>
-          <a:xfrm>
-            <a:off x="11026566" y="2130552"/>
-            <a:ext cx="660562" cy="201168"/>
-          </a:xfrm>
-          <a:prstGeom prst="roundRect">
-            <a:avLst/>
-          </a:prstGeom>
-          <a:solidFill>
-            <a:srgbClr val="FFEB3B"/>
-          </a:solidFill>
-          <a:ln w="12700">
-            <a:solidFill>
-              <a:srgbClr val="004080"/>
-            </a:solidFill>
-          </a:ln>
-        </p:spPr>
-        <p:style>
-          <a:lnRef idx="1">
-            <a:schemeClr val="accent1"/>
-          </a:lnRef>
-          <a:fillRef idx="3">
-            <a:schemeClr val="accent1"/>
-          </a:fillRef>
-          <a:effectRef idx="2">
-            <a:schemeClr val="accent1"/>
-          </a:effectRef>
-          <a:fontRef idx="minor">
-            <a:schemeClr val="lt1"/>
-          </a:fontRef>
-        </p:style>
-        <p:txBody>
-          <a:bodyPr rtlCol="0" anchor="ctr"/>
-          <a:lstStyle/>
-          <a:p>
-            <a:pPr algn="ctr"/>
-            <a:r>
-              <a:rPr b="1" sz="1000">
-                <a:solidFill>
-                  <a:srgbClr val="004080"/>
-                </a:solidFill>
-                <a:latin typeface="Arial"/>
-              </a:rPr>
-              <a:t>Key Innovation</a:t>
-            </a:r>
-          </a:p>
-        </p:txBody>
-      </p:sp>
-      <p:sp>
-        <p:nvSpPr>
-          <p:cNvPr id="32" name="TextBox 31"/>
-          <p:cNvSpPr txBox="1"/>
-          <p:nvPr/>
-        </p:nvSpPr>
-        <p:spPr>
-          <a:xfrm>
-            <a:off x="10625328" y="2404872"/>
-            <a:ext cx="1463040" cy="237744"/>
-          </a:xfrm>
-          <a:prstGeom prst="rect">
-            <a:avLst/>
-          </a:prstGeom>
-          <a:noFill/>
-        </p:spPr>
-        <p:txBody>
-          <a:bodyPr wrap="square" anchor="ctr">
-            <a:spAutoFit/>
-          </a:bodyPr>
-          <a:lstStyle/>
-          <a:p>
-            <a:pPr algn="ctr"/>
-            <a:r>
-              <a:rPr sz="1100" b="1">
-                <a:solidFill>
-                  <a:srgbClr val="004080"/>
-                </a:solidFill>
-                <a:latin typeface="Arial"/>
-              </a:rPr>
-              <a:t>Stage 6</a:t>
-            </a:r>
-          </a:p>
-        </p:txBody>
-      </p:sp>
-      <p:sp>
-        <p:nvSpPr>
-          <p:cNvPr id="33" name="TextBox 32"/>
-          <p:cNvSpPr txBox="1"/>
-          <p:nvPr/>
-        </p:nvSpPr>
-        <p:spPr>
-          <a:xfrm>
-            <a:off x="10643616" y="2660904"/>
-            <a:ext cx="1426464" cy="310896"/>
-          </a:xfrm>
-          <a:prstGeom prst="rect">
-            <a:avLst/>
-          </a:prstGeom>
-          <a:noFill/>
-        </p:spPr>
-        <p:txBody>
-          <a:bodyPr wrap="square" anchor="ctr">
-            <a:spAutoFit/>
-          </a:bodyPr>
-          <a:lstStyle/>
-          <a:p>
-            <a:pPr algn="ctr"/>
-            <a:r>
-              <a:rPr sz="1500" b="1">
-                <a:solidFill>
-                  <a:srgbClr val="1F2937"/>
-                </a:solidFill>
-                <a:latin typeface="Arial"/>
-              </a:rPr>
-              <a:t>XAI</a:t>
-            </a:r>
-          </a:p>
-        </p:txBody>
-      </p:sp>
-      <p:sp>
-        <p:nvSpPr>
-          <p:cNvPr id="34" name="TextBox 33"/>
-          <p:cNvSpPr txBox="1"/>
-          <p:nvPr/>
-        </p:nvSpPr>
-        <p:spPr>
-          <a:xfrm>
-            <a:off x="10661904" y="3090672"/>
-            <a:ext cx="1389888" cy="420624"/>
-          </a:xfrm>
-          <a:prstGeom prst="rect">
-            <a:avLst/>
-          </a:prstGeom>
-          <a:noFill/>
-        </p:spPr>
-        <p:txBody>
-          <a:bodyPr wrap="square" anchor="ctr">
-            <a:spAutoFit/>
-          </a:bodyPr>
-          <a:lstStyle/>
-          <a:p>
-            <a:pPr algn="ctr"/>
-            <a:r>
-              <a:rPr sz="1050" b="0">
-                <a:solidFill>
-                  <a:srgbClr val="1F2937"/>
-                </a:solidFill>
-                <a:latin typeface="Arial"/>
-              </a:rPr>
-              <a:t>Integrated Gradients</a:t>
-            </a:r>
-          </a:p>
-        </p:txBody>
-      </p:sp>
-      <p:sp>
-        <p:nvSpPr>
-          <p:cNvPr id="35" name="Rounded Rectangle 34"/>
-          <p:cNvSpPr/>
-          <p:nvPr/>
-        </p:nvSpPr>
-        <p:spPr>
-          <a:xfrm>
-            <a:off x="12289536" y="2331720"/>
-            <a:ext cx="1572768" cy="1444752"/>
-          </a:xfrm>
-          <a:prstGeom prst="roundRect">
-            <a:avLst/>
-          </a:prstGeom>
-          <a:solidFill>
-            <a:srgbClr val="E6F2FF"/>
-          </a:solidFill>
-          <a:ln w="22860">
-            <a:solidFill>
-              <a:srgbClr val="004080"/>
-            </a:solidFill>
-          </a:ln>
-        </p:spPr>
-        <p:style>
-          <a:lnRef idx="1">
-            <a:schemeClr val="accent1"/>
-          </a:lnRef>
-          <a:fillRef idx="3">
-            <a:schemeClr val="accent1"/>
-          </a:fillRef>
-          <a:effectRef idx="2">
-            <a:schemeClr val="accent1"/>
-          </a:effectRef>
-          <a:fontRef idx="minor">
-            <a:schemeClr val="lt1"/>
-          </a:fontRef>
-        </p:style>
-        <p:txBody>
-          <a:bodyPr rtlCol="0" anchor="ctr"/>
-          <a:lstStyle/>
-          <a:p>
-            <a:pPr algn="ctr"/>
-          </a:p>
-        </p:txBody>
-      </p:sp>
-      <p:sp>
-        <p:nvSpPr>
-          <p:cNvPr id="36" name="TextBox 35"/>
-          <p:cNvSpPr txBox="1"/>
-          <p:nvPr/>
-        </p:nvSpPr>
-        <p:spPr>
-          <a:xfrm>
-            <a:off x="12344400" y="2404872"/>
-            <a:ext cx="1463040" cy="237744"/>
-          </a:xfrm>
-          <a:prstGeom prst="rect">
-            <a:avLst/>
-          </a:prstGeom>
-          <a:noFill/>
-        </p:spPr>
-        <p:txBody>
-          <a:bodyPr wrap="square" anchor="ctr">
-            <a:spAutoFit/>
-          </a:bodyPr>
-          <a:lstStyle/>
-          <a:p>
-            <a:pPr algn="ctr"/>
-            <a:r>
-              <a:rPr sz="1100" b="1">
-                <a:solidFill>
-                  <a:srgbClr val="004080"/>
-                </a:solidFill>
-                <a:latin typeface="Arial"/>
-              </a:rPr>
-              <a:t>Stage 7</a:t>
-            </a:r>
-          </a:p>
-        </p:txBody>
-      </p:sp>
-      <p:sp>
-        <p:nvSpPr>
-          <p:cNvPr id="37" name="TextBox 36"/>
-          <p:cNvSpPr txBox="1"/>
-          <p:nvPr/>
-        </p:nvSpPr>
-        <p:spPr>
-          <a:xfrm>
-            <a:off x="12362688" y="2660904"/>
-            <a:ext cx="1426464" cy="310896"/>
-          </a:xfrm>
-          <a:prstGeom prst="rect">
-            <a:avLst/>
-          </a:prstGeom>
-          <a:noFill/>
-        </p:spPr>
-        <p:txBody>
-          <a:bodyPr wrap="square" anchor="ctr">
-            <a:spAutoFit/>
-          </a:bodyPr>
-          <a:lstStyle/>
-          <a:p>
-            <a:pPr algn="ctr"/>
-            <a:r>
-              <a:rPr sz="1500" b="1">
-                <a:solidFill>
-                  <a:srgbClr val="1F2937"/>
-                </a:solidFill>
-                <a:latin typeface="Arial"/>
-              </a:rPr>
-              <a:t>Export</a:t>
-            </a:r>
-          </a:p>
-        </p:txBody>
-      </p:sp>
-      <p:sp>
-        <p:nvSpPr>
-          <p:cNvPr id="38" name="TextBox 37"/>
-          <p:cNvSpPr txBox="1"/>
-          <p:nvPr/>
-        </p:nvSpPr>
-        <p:spPr>
-          <a:xfrm>
-            <a:off x="12380976" y="3090672"/>
-            <a:ext cx="1389888" cy="420624"/>
-          </a:xfrm>
-          <a:prstGeom prst="rect">
-            <a:avLst/>
-          </a:prstGeom>
-          <a:noFill/>
-        </p:spPr>
-        <p:txBody>
-          <a:bodyPr wrap="square" anchor="ctr">
-            <a:spAutoFit/>
-          </a:bodyPr>
-          <a:lstStyle/>
-          <a:p>
-            <a:pPr algn="ctr"/>
-            <a:r>
-              <a:rPr sz="1050" b="0">
-                <a:solidFill>
-                  <a:srgbClr val="1F2937"/>
-                </a:solidFill>
-                <a:latin typeface="Arial"/>
-              </a:rPr>
-              <a:t>Saved model package</a:t>
+              <a:t>Final emotion report
+(labels, scores, heatmap)</a:t>
             </a:r>
           </a:p>
         </p:txBody>
       </p:sp>
       <p:cxnSp>
         <p:nvCxnSpPr>
-          <p:cNvPr id="39" name="Connector 38"/>
+          <p:cNvPr id="108" name="Connector 107"/>
           <p:cNvCxnSpPr/>
           <p:nvPr/>
         </p:nvCxnSpPr>
         <p:spPr>
-          <a:xfrm>
-            <a:off x="1828800" y="3054096.0"/>
-            <a:ext cx="146304" cy="0.0"/>
+          <a:xfrm flipV="1">
+            <a:off x="2359152" y="1847088"/>
+            <a:ext cx="429768" cy="274320"/>
           </a:xfrm>
           <a:prstGeom prst="line">
             <a:avLst/>
           </a:prstGeom>
-          <a:ln w="27940">
+          <a:ln w="25400">
             <a:solidFill>
               <a:srgbClr val="004080"/>
             </a:solidFill>
@@ -4565,19 +7541,19 @@
       </p:cxnSp>
       <p:cxnSp>
         <p:nvCxnSpPr>
-          <p:cNvPr id="40" name="Connector 39"/>
+          <p:cNvPr id="109" name="Connector 108"/>
           <p:cNvCxnSpPr/>
           <p:nvPr/>
         </p:nvCxnSpPr>
         <p:spPr>
           <a:xfrm>
-            <a:off x="3547872" y="3054096.0"/>
-            <a:ext cx="146304" cy="0.0"/>
+            <a:off x="4169663" y="2084831"/>
+            <a:ext cx="0" cy="402337"/>
           </a:xfrm>
           <a:prstGeom prst="line">
             <a:avLst/>
           </a:prstGeom>
-          <a:ln w="27940">
+          <a:ln w="25400">
             <a:solidFill>
               <a:srgbClr val="004080"/>
             </a:solidFill>
@@ -4600,19 +7576,19 @@
       </p:cxnSp>
       <p:cxnSp>
         <p:nvCxnSpPr>
-          <p:cNvPr id="41" name="Connector 40"/>
+          <p:cNvPr id="110" name="Connector 109"/>
           <p:cNvCxnSpPr/>
           <p:nvPr/>
         </p:nvCxnSpPr>
         <p:spPr>
           <a:xfrm>
-            <a:off x="5266944" y="3054096.0"/>
-            <a:ext cx="146304" cy="0.0"/>
+            <a:off x="4910328" y="4873752"/>
+            <a:ext cx="0" cy="429768"/>
           </a:xfrm>
           <a:prstGeom prst="line">
             <a:avLst/>
           </a:prstGeom>
-          <a:ln w="27940">
+          <a:ln w="25400">
             <a:solidFill>
               <a:srgbClr val="004080"/>
             </a:solidFill>
@@ -4635,19 +7611,19 @@
       </p:cxnSp>
       <p:cxnSp>
         <p:nvCxnSpPr>
-          <p:cNvPr id="42" name="Connector 41"/>
+          <p:cNvPr id="111" name="Connector 110"/>
           <p:cNvCxnSpPr/>
           <p:nvPr/>
         </p:nvCxnSpPr>
         <p:spPr>
           <a:xfrm>
-            <a:off x="6986016" y="3054096.0"/>
-            <a:ext cx="146304" cy="0.0"/>
+            <a:off x="4910328" y="5650992"/>
+            <a:ext cx="0" cy="310896"/>
           </a:xfrm>
           <a:prstGeom prst="line">
             <a:avLst/>
           </a:prstGeom>
-          <a:ln w="27940">
+          <a:ln w="25400">
             <a:solidFill>
               <a:srgbClr val="004080"/>
             </a:solidFill>
@@ -4670,19 +7646,19 @@
       </p:cxnSp>
       <p:cxnSp>
         <p:nvCxnSpPr>
-          <p:cNvPr id="43" name="Connector 42"/>
+          <p:cNvPr id="112" name="Connector 111"/>
           <p:cNvCxnSpPr/>
           <p:nvPr/>
         </p:nvCxnSpPr>
         <p:spPr>
           <a:xfrm>
-            <a:off x="8705088" y="3054096.0"/>
-            <a:ext cx="146304" cy="0.0"/>
+            <a:off x="6245352" y="6419088"/>
+            <a:ext cx="320040" cy="0"/>
           </a:xfrm>
           <a:prstGeom prst="line">
             <a:avLst/>
           </a:prstGeom>
-          <a:ln w="27940">
+          <a:ln w="25400">
             <a:solidFill>
               <a:srgbClr val="004080"/>
             </a:solidFill>
@@ -4705,19 +7681,19 @@
       </p:cxnSp>
       <p:cxnSp>
         <p:nvCxnSpPr>
-          <p:cNvPr id="44" name="Connector 43"/>
+          <p:cNvPr id="113" name="Connector 112"/>
           <p:cNvCxnSpPr/>
           <p:nvPr/>
         </p:nvCxnSpPr>
         <p:spPr>
           <a:xfrm>
-            <a:off x="10424160" y="3054096.0"/>
-            <a:ext cx="146304" cy="0.0"/>
+            <a:off x="8467344" y="6400800"/>
+            <a:ext cx="1591056" cy="0"/>
           </a:xfrm>
           <a:prstGeom prst="line">
             <a:avLst/>
           </a:prstGeom>
-          <a:ln w="27940">
+          <a:ln w="25400">
             <a:solidFill>
               <a:srgbClr val="004080"/>
             </a:solidFill>
@@ -4740,19 +7716,19 @@
       </p:cxnSp>
       <p:cxnSp>
         <p:nvCxnSpPr>
-          <p:cNvPr id="45" name="Connector 44"/>
+          <p:cNvPr id="114" name="Connector 113"/>
           <p:cNvCxnSpPr/>
           <p:nvPr/>
         </p:nvCxnSpPr>
         <p:spPr>
-          <a:xfrm>
-            <a:off x="12143232" y="3054096.0"/>
-            <a:ext cx="146304" cy="0.0"/>
+          <a:xfrm flipH="1">
+            <a:off x="10085832" y="5559552"/>
+            <a:ext cx="356616" cy="0"/>
           </a:xfrm>
           <a:prstGeom prst="line">
             <a:avLst/>
           </a:prstGeom>
-          <a:ln w="27940">
+          <a:ln w="25400">
             <a:solidFill>
               <a:srgbClr val="004080"/>
             </a:solidFill>
@@ -4773,91 +7749,177 @@
           </a:fontRef>
         </p:style>
       </p:cxnSp>
-      <p:sp>
-        <p:nvSpPr>
-          <p:cNvPr id="46" name="Rounded Rectangle 45"/>
-          <p:cNvSpPr/>
-          <p:nvPr/>
-        </p:nvSpPr>
-        <p:spPr>
-          <a:xfrm>
-            <a:off x="5120640" y="4617720"/>
-            <a:ext cx="4389120" cy="420624"/>
-          </a:xfrm>
-          <a:prstGeom prst="roundRect">
-            <a:avLst/>
-          </a:prstGeom>
-          <a:solidFill>
-            <a:srgbClr val="FFEB3B"/>
-          </a:solidFill>
-          <a:ln w="13970">
+      <p:cxnSp>
+        <p:nvCxnSpPr>
+          <p:cNvPr id="115" name="Connector 114"/>
+          <p:cNvCxnSpPr/>
+          <p:nvPr/>
+        </p:nvCxnSpPr>
+        <p:spPr>
+          <a:xfrm flipV="1">
+            <a:off x="11795760" y="6336792"/>
+            <a:ext cx="0" cy="201168"/>
+          </a:xfrm>
+          <a:prstGeom prst="line">
+            <a:avLst/>
+          </a:prstGeom>
+          <a:ln w="25400">
             <a:solidFill>
               <a:srgbClr val="004080"/>
             </a:solidFill>
           </a:ln>
         </p:spPr>
         <p:style>
-          <a:lnRef idx="1">
+          <a:lnRef idx="2">
             <a:schemeClr val="accent1"/>
           </a:lnRef>
-          <a:fillRef idx="3">
+          <a:fillRef idx="0">
             <a:schemeClr val="accent1"/>
           </a:fillRef>
-          <a:effectRef idx="2">
+          <a:effectRef idx="1">
             <a:schemeClr val="accent1"/>
           </a:effectRef>
           <a:fontRef idx="minor">
-            <a:schemeClr val="lt1"/>
+            <a:schemeClr val="tx1"/>
           </a:fontRef>
         </p:style>
-        <p:txBody>
-          <a:bodyPr rtlCol="0" anchor="ctr"/>
-          <a:lstStyle/>
-          <a:p>
-            <a:pPr algn="ctr"/>
-            <a:r>
-              <a:rPr sz="1100" b="1">
+      </p:cxnSp>
+      <p:cxnSp>
+        <p:nvCxnSpPr>
+          <p:cNvPr id="116" name="Connector 115"/>
+          <p:cNvCxnSpPr/>
+          <p:nvPr/>
+        </p:nvCxnSpPr>
+        <p:spPr>
+          <a:xfrm flipV="1">
+            <a:off x="11841480" y="4059936"/>
+            <a:ext cx="0" cy="676656"/>
+          </a:xfrm>
+          <a:prstGeom prst="line">
+            <a:avLst/>
+          </a:prstGeom>
+          <a:ln w="25400">
+            <a:solidFill>
+              <a:srgbClr val="004080"/>
+            </a:solidFill>
+          </a:ln>
+        </p:spPr>
+        <p:style>
+          <a:lnRef idx="2">
+            <a:schemeClr val="accent1"/>
+          </a:lnRef>
+          <a:fillRef idx="0">
+            <a:schemeClr val="accent1"/>
+          </a:fillRef>
+          <a:effectRef idx="1">
+            <a:schemeClr val="accent1"/>
+          </a:effectRef>
+          <a:fontRef idx="minor">
+            <a:schemeClr val="tx1"/>
+          </a:fontRef>
+        </p:style>
+      </p:cxnSp>
+      <p:cxnSp>
+        <p:nvCxnSpPr>
+          <p:cNvPr id="117" name="Connector 116"/>
+          <p:cNvCxnSpPr/>
+          <p:nvPr/>
+        </p:nvCxnSpPr>
+        <p:spPr>
+          <a:xfrm flipV="1">
+            <a:off x="11850624" y="2505456"/>
+            <a:ext cx="0" cy="347472"/>
+          </a:xfrm>
+          <a:prstGeom prst="line">
+            <a:avLst/>
+          </a:prstGeom>
+          <a:ln w="25400">
+            <a:solidFill>
+              <a:srgbClr val="004080"/>
+            </a:solidFill>
+          </a:ln>
+        </p:spPr>
+        <p:style>
+          <a:lnRef idx="2">
+            <a:schemeClr val="accent1"/>
+          </a:lnRef>
+          <a:fillRef idx="0">
+            <a:schemeClr val="accent1"/>
+          </a:fillRef>
+          <a:effectRef idx="1">
+            <a:schemeClr val="accent1"/>
+          </a:effectRef>
+          <a:fontRef idx="minor">
+            <a:schemeClr val="tx1"/>
+          </a:fontRef>
+        </p:style>
+      </p:cxnSp>
+      <p:cxnSp>
+        <p:nvCxnSpPr>
+          <p:cNvPr id="118" name="Connector 117"/>
+          <p:cNvCxnSpPr/>
+          <p:nvPr/>
+        </p:nvCxnSpPr>
+        <p:spPr>
+          <a:xfrm flipV="1">
+            <a:off x="11850624" y="1572768"/>
+            <a:ext cx="0" cy="420624"/>
+          </a:xfrm>
+          <a:prstGeom prst="line">
+            <a:avLst/>
+          </a:prstGeom>
+          <a:ln w="25400">
+            <a:solidFill>
+              <a:srgbClr val="004080"/>
+            </a:solidFill>
+          </a:ln>
+        </p:spPr>
+        <p:style>
+          <a:lnRef idx="2">
+            <a:schemeClr val="accent1"/>
+          </a:lnRef>
+          <a:fillRef idx="0">
+            <a:schemeClr val="accent1"/>
+          </a:fillRef>
+          <a:effectRef idx="1">
+            <a:schemeClr val="accent1"/>
+          </a:effectRef>
+          <a:fontRef idx="minor">
+            <a:schemeClr val="tx1"/>
+          </a:fontRef>
+        </p:style>
+      </p:cxnSp>
+      <p:sp>
+        <p:nvSpPr>
+          <p:cNvPr id="119" name="TextBox 118"/>
+          <p:cNvSpPr txBox="1"/>
+          <p:nvPr/>
+        </p:nvSpPr>
+        <p:spPr>
+          <a:xfrm>
+            <a:off x="438912" y="7543800"/>
+            <a:ext cx="13716000" cy="201168"/>
+          </a:xfrm>
+          <a:prstGeom prst="rect">
+            <a:avLst/>
+          </a:prstGeom>
+          <a:noFill/>
+        </p:spPr>
+        <p:txBody>
+          <a:bodyPr wrap="none" anchor="ctr">
+            <a:spAutoFit/>
+          </a:bodyPr>
+          <a:lstStyle/>
+          <a:p>
+            <a:pPr algn="l"/>
+            <a:r>
+              <a:rPr sz="950">
                 <a:solidFill>
                   <a:srgbClr val="004080"/>
                 </a:solidFill>
                 <a:latin typeface="Arial"/>
               </a:rPr>
-              <a:t>Highlighted blocks mark core method contributions</a:t>
-            </a:r>
-          </a:p>
-        </p:txBody>
-      </p:sp>
-      <p:sp>
-        <p:nvSpPr>
-          <p:cNvPr id="47" name="TextBox 46"/>
-          <p:cNvSpPr txBox="1"/>
-          <p:nvPr/>
-        </p:nvSpPr>
-        <p:spPr>
-          <a:xfrm>
-            <a:off x="457200" y="7452360"/>
-            <a:ext cx="13716000" cy="274320"/>
-          </a:xfrm>
-          <a:prstGeom prst="rect">
-            <a:avLst/>
-          </a:prstGeom>
-          <a:noFill/>
-        </p:spPr>
-        <p:txBody>
-          <a:bodyPr wrap="none" anchor="ctr">
-            <a:spAutoFit/>
-          </a:bodyPr>
-          <a:lstStyle/>
-          <a:p>
-            <a:pPr algn="l"/>
-            <a:r>
-              <a:rPr sz="1000">
-                <a:solidFill>
-                  <a:srgbClr val="004080"/>
-                </a:solidFill>
-                <a:latin typeface="Arial"/>
-              </a:rPr>
-              <a:t>Editable PowerPoint vector layout generated with python-pptx</a:t>
+              <a:t>Editable vector diagram generated with python-pptx and adapted to the user's detailed reference style.</a:t>
             </a:r>
           </a:p>
         </p:txBody>
